--- a/pptx/EOD-Karnal-Project-Finance.pptx
+++ b/pptx/EOD-Karnal-Project-Finance.pptx
@@ -3681,7 +3681,7 @@
         <p:spPr>
           <a:xfrm>
             <a:off x="566928" y="2706624"/>
-            <a:ext cx="10241280" cy="928878"/>
+            <a:ext cx="10241280" cy="911352"/>
           </a:xfrm>
           <a:prstGeom prst="rect">
             <a:avLst/>
@@ -3722,7 +3722,7 @@
         </p:nvSpPr>
         <p:spPr>
           <a:xfrm>
-            <a:off x="566928" y="3781806"/>
+            <a:off x="566928" y="3764280"/>
             <a:ext cx="10241280" cy="694944"/>
           </a:xfrm>
           <a:prstGeom prst="rect">
@@ -3904,7 +3904,7 @@
             <a:r>
               <a:rPr lang="en-US" sz="1000" dirty="0">
                 <a:solidFill>
-                  <a:srgbClr val="7C889B"/>
+                  <a:srgbClr val="A8B2C4"/>
                 </a:solidFill>
                 <a:latin typeface="Calibri" pitchFamily="34" charset="0"/>
                 <a:ea typeface="Calibri" pitchFamily="34" charset="-122"/>
@@ -4024,7 +4024,7 @@
             <a:r>
               <a:rPr lang="en-US" sz="1000" dirty="0">
                 <a:solidFill>
-                  <a:srgbClr val="7C889B"/>
+                  <a:srgbClr val="A8B2C4"/>
                 </a:solidFill>
                 <a:latin typeface="Calibri" pitchFamily="34" charset="0"/>
                 <a:ea typeface="Calibri" pitchFamily="34" charset="-122"/>
@@ -4144,7 +4144,7 @@
             <a:r>
               <a:rPr lang="en-US" sz="1000" dirty="0">
                 <a:solidFill>
-                  <a:srgbClr val="7C889B"/>
+                  <a:srgbClr val="A8B2C4"/>
                 </a:solidFill>
                 <a:latin typeface="Calibri" pitchFamily="34" charset="0"/>
                 <a:ea typeface="Calibri" pitchFamily="34" charset="-122"/>
@@ -4264,7 +4264,7 @@
             <a:r>
               <a:rPr lang="en-US" sz="1000" dirty="0">
                 <a:solidFill>
-                  <a:srgbClr val="7C889B"/>
+                  <a:srgbClr val="A8B2C4"/>
                 </a:solidFill>
                 <a:latin typeface="Calibri" pitchFamily="34" charset="0"/>
                 <a:ea typeface="Calibri" pitchFamily="34" charset="-122"/>
@@ -6140,11 +6140,11 @@
         <p:spPr>
           <a:xfrm>
             <a:off x="566928" y="4224528"/>
-            <a:ext cx="11057839" cy="1870083"/>
+            <a:ext cx="11057839" cy="1737492"/>
           </a:xfrm>
           <a:prstGeom prst="roundRect">
             <a:avLst>
-              <a:gd name="adj" fmla="val 2445"/>
+              <a:gd name="adj" fmla="val 2631"/>
             </a:avLst>
           </a:prstGeom>
           <a:solidFill>
@@ -6166,8 +6166,8 @@
         </p:nvSpPr>
         <p:spPr>
           <a:xfrm>
-            <a:off x="804672" y="4370832"/>
-            <a:ext cx="2743200" cy="201168"/>
+            <a:off x="804672" y="4334256"/>
+            <a:ext cx="2743200" cy="182880"/>
           </a:xfrm>
           <a:prstGeom prst="rect">
             <a:avLst/>
@@ -6205,8 +6205,8 @@
         </p:nvSpPr>
         <p:spPr>
           <a:xfrm>
-            <a:off x="804672" y="4572000"/>
-            <a:ext cx="10582351" cy="294145"/>
+            <a:off x="804672" y="4517136"/>
+            <a:ext cx="10582351" cy="288595"/>
           </a:xfrm>
           <a:prstGeom prst="rect">
             <a:avLst/>
@@ -6247,8 +6247,8 @@
         </p:nvSpPr>
         <p:spPr>
           <a:xfrm>
-            <a:off x="804672" y="4939297"/>
-            <a:ext cx="10582351" cy="1082162"/>
+            <a:off x="804672" y="4860595"/>
+            <a:ext cx="10582351" cy="1028273"/>
           </a:xfrm>
           <a:prstGeom prst="rect">
             <a:avLst/>
@@ -7233,8 +7233,8 @@
         </p:nvSpPr>
         <p:spPr>
           <a:xfrm>
-            <a:off x="566928" y="1005840"/>
-            <a:ext cx="11057839" cy="512064"/>
+            <a:off x="566928" y="950976"/>
+            <a:ext cx="11057839" cy="462280"/>
           </a:xfrm>
           <a:prstGeom prst="rect">
             <a:avLst/>
@@ -7248,12 +7248,12 @@
           <a:p>
             <a:pPr indent="0" marL="0">
               <a:lnSpc>
-                <a:spcPts val="1900"/>
+                <a:spcPts val="1750"/>
               </a:lnSpc>
               <a:buNone/>
             </a:pPr>
             <a:r>
-              <a:rPr lang="en-US" sz="1350" dirty="0">
+              <a:rPr lang="en-US" sz="1250" dirty="0">
                 <a:solidFill>
                   <a:srgbClr val="3B4660"/>
                 </a:solidFill>
@@ -7263,7 +7263,7 @@
               </a:rPr>
               <a:t>Karnal replicates the Delhi–Meerut Expressway format on a busier corridor. DME proved the highway-stopover model works and exposed exactly where it fails — indoor-only product against a fixed common-area charge. Karnal is built with the outdoor activity stack from day one.</a:t>
             </a:r>
-            <a:endParaRPr lang="en-US" sz="1350" dirty="0"/>
+            <a:endParaRPr lang="en-US" sz="1250" dirty="0"/>
           </a:p>
         </p:txBody>
       </p:sp>
@@ -7282,7 +7282,7 @@
           </p:nvPr>
         </p:nvGraphicFramePr>
         <p:xfrm>
-          <a:off x="566928" y="1627632"/>
+          <a:off x="566928" y="1541272"/>
           <a:ext cx="11057839" cy="914400"/>
         </p:xfrm>
         <a:graphic>
@@ -8133,12 +8133,12 @@
         </p:nvSpPr>
         <p:spPr>
           <a:xfrm>
-            <a:off x="566928" y="4023360"/>
-            <a:ext cx="11057839" cy="1640690"/>
+            <a:off x="566928" y="3863848"/>
+            <a:ext cx="11057839" cy="1962556"/>
           </a:xfrm>
           <a:prstGeom prst="roundRect">
             <a:avLst>
-              <a:gd name="adj" fmla="val 2787"/>
+              <a:gd name="adj" fmla="val 2330"/>
             </a:avLst>
           </a:prstGeom>
           <a:solidFill>
@@ -8160,8 +8160,8 @@
         </p:nvSpPr>
         <p:spPr>
           <a:xfrm>
-            <a:off x="804672" y="4169664"/>
-            <a:ext cx="2743200" cy="201168"/>
+            <a:off x="804672" y="3973576"/>
+            <a:ext cx="2743200" cy="182880"/>
           </a:xfrm>
           <a:prstGeom prst="rect">
             <a:avLst/>
@@ -8199,8 +8199,8 @@
         </p:nvSpPr>
         <p:spPr>
           <a:xfrm>
-            <a:off x="804672" y="4370832"/>
-            <a:ext cx="10582351" cy="294145"/>
+            <a:off x="804672" y="4156456"/>
+            <a:ext cx="10582351" cy="288595"/>
           </a:xfrm>
           <a:prstGeom prst="rect">
             <a:avLst/>
@@ -8227,7 +8227,7 @@
                 <a:ea typeface="Calibri" pitchFamily="34" charset="-122"/>
                 <a:cs typeface="Calibri" pitchFamily="34" charset="-120"/>
               </a:rPr>
-              <a:t>What makes this the strongest of the three</a:t>
+              <a:t>The strongest of the three — and one fact to settle first</a:t>
             </a:r>
             <a:endParaRPr lang="en-US" sz="1900" dirty="0"/>
           </a:p>
@@ -8241,8 +8241,8 @@
         </p:nvSpPr>
         <p:spPr>
           <a:xfrm>
-            <a:off x="804672" y="4738129"/>
-            <a:ext cx="10582351" cy="852769"/>
+            <a:off x="804672" y="4499915"/>
+            <a:ext cx="10582351" cy="1253338"/>
           </a:xfrm>
           <a:prstGeom prst="rect">
             <a:avLst/>
@@ -8269,149 +8269,28 @@
                 <a:ea typeface="Calibri" pitchFamily="34" charset="-122"/>
                 <a:cs typeface="Calibri" pitchFamily="34" charset="-120"/>
               </a:rPr>
-              <a:t>No auction — the rent is a negotiated minimum guarantee, not a number set against unknown bidders. No authority tariff control — E-O-D prices its own tickets. No mandated manpower floor — the establishment flexes with the season. No restoration obligation over somebody else's bronze statue. And real assets that can secure the facility funding them.</a:t>
+              <a:t>No auction, no authority tariff control, no mandated manpower floor, no restoration obligation over somebody else's bronze statue — and real assets that can secure the facility funding them.</a:t>
             </a:r>
             <a:endParaRPr lang="en-US" sz="1200" dirty="0"/>
           </a:p>
-        </p:txBody>
-      </p:sp>
-      <p:sp>
-        <p:nvSpPr>
-          <p:cNvPr id="11" name="Shape 8"/>
-          <p:cNvSpPr/>
-          <p:nvPr/>
-        </p:nvSpPr>
-        <p:spPr>
-          <a:xfrm>
-            <a:off x="566928" y="5865218"/>
-            <a:ext cx="11057839" cy="731520"/>
-          </a:xfrm>
-          <a:prstGeom prst="roundRect">
-            <a:avLst>
-              <a:gd name="adj" fmla="val 6250"/>
-            </a:avLst>
-          </a:prstGeom>
-          <a:solidFill>
-            <a:srgbClr val="FDF6EC"/>
-          </a:solidFill>
-          <a:ln w="15875">
-            <a:solidFill>
-              <a:srgbClr val="D97706"/>
-            </a:solidFill>
-            <a:prstDash val="solid"/>
-          </a:ln>
-        </p:spPr>
-      </p:sp>
-      <p:sp>
-        <p:nvSpPr>
-          <p:cNvPr id="12" name="Text 9"/>
-          <p:cNvSpPr/>
-          <p:nvPr/>
-        </p:nvSpPr>
-        <p:spPr>
-          <a:xfrm>
-            <a:off x="804672" y="6011522"/>
-            <a:ext cx="2743200" cy="201168"/>
-          </a:xfrm>
-          <a:prstGeom prst="rect">
-            <a:avLst/>
-          </a:prstGeom>
-          <a:noFill/>
-          <a:ln/>
-        </p:spPr>
-        <p:txBody>
-          <a:bodyPr wrap="square" lIns="0" tIns="0" rIns="0" bIns="0" rtlCol="0" anchor="ctr"/>
-          <a:lstStyle/>
-          <a:p>
-            <a:pPr indent="0" marL="0">
-              <a:buNone/>
-            </a:pPr>
-            <a:r>
-              <a:rPr lang="en-US" sz="850" b="1" spc="160" kern="0" dirty="0">
-                <a:solidFill>
-                  <a:srgbClr val="D97706"/>
-                </a:solidFill>
-                <a:latin typeface="Calibri" pitchFamily="34" charset="0"/>
-                <a:ea typeface="Calibri" pitchFamily="34" charset="-122"/>
-                <a:cs typeface="Calibri" pitchFamily="34" charset="-120"/>
-              </a:rPr>
-              <a:t>VERDICT</a:t>
-            </a:r>
-            <a:endParaRPr lang="en-US" sz="850" dirty="0"/>
-          </a:p>
-        </p:txBody>
-      </p:sp>
-      <p:sp>
-        <p:nvSpPr>
-          <p:cNvPr id="13" name="Text 10"/>
-          <p:cNvSpPr/>
-          <p:nvPr/>
-        </p:nvSpPr>
-        <p:spPr>
-          <a:xfrm>
-            <a:off x="804672" y="6212690"/>
-            <a:ext cx="10582351" cy="232220"/>
-          </a:xfrm>
-          <a:prstGeom prst="rect">
-            <a:avLst/>
-          </a:prstGeom>
-          <a:noFill/>
-          <a:ln/>
-        </p:spPr>
-        <p:txBody>
-          <a:bodyPr wrap="square" lIns="0" tIns="0" rIns="0" bIns="0" rtlCol="0" anchor="t"/>
-          <a:lstStyle/>
           <a:p>
             <a:pPr indent="0" marL="0">
               <a:lnSpc>
-                <a:spcPts val="1725"/>
+                <a:spcPts val="1704"/>
               </a:lnSpc>
               <a:buNone/>
             </a:pPr>
-            <a:r>
-              <a:rPr lang="en-US" sz="1500" b="1" dirty="0">
-                <a:solidFill>
-                  <a:srgbClr val="0A1426"/>
-                </a:solidFill>
-                <a:latin typeface="Calibri" pitchFamily="34" charset="0"/>
-                <a:ea typeface="Calibri" pitchFamily="34" charset="-122"/>
-                <a:cs typeface="Calibri" pitchFamily="34" charset="-120"/>
-              </a:rPr>
-              <a:t>One fact to settle before any of this is bid or drawn</a:t>
-            </a:r>
-            <a:endParaRPr lang="en-US" sz="1500" dirty="0"/>
-          </a:p>
-        </p:txBody>
-      </p:sp>
-      <p:sp>
-        <p:nvSpPr>
-          <p:cNvPr id="14" name="Text 11"/>
-          <p:cNvSpPr/>
-          <p:nvPr/>
-        </p:nvSpPr>
-        <p:spPr>
-          <a:xfrm>
-            <a:off x="804672" y="6518062"/>
-            <a:ext cx="10582351" cy="182880"/>
-          </a:xfrm>
-          <a:prstGeom prst="rect">
-            <a:avLst/>
-          </a:prstGeom>
-          <a:noFill/>
-          <a:ln/>
-        </p:spPr>
-        <p:txBody>
-          <a:bodyPr wrap="square" lIns="0" tIns="0" rIns="0" bIns="0" rtlCol="0" anchor="t"/>
-          <a:lstStyle/>
+            <a:endParaRPr lang="en-US" sz="1200" dirty="0"/>
+          </a:p>
           <a:p>
             <a:pPr indent="0" marL="0">
               <a:lnSpc>
-                <a:spcPts val="1207"/>
+                <a:spcPts val="1704"/>
               </a:lnSpc>
               <a:buNone/>
             </a:pPr>
             <a:r>
-              <a:rPr lang="en-US" sz="850" dirty="0">
+              <a:rPr lang="en-US" sz="1200" dirty="0">
                 <a:solidFill>
                   <a:srgbClr val="3B4660"/>
                 </a:solidFill>
@@ -8419,15 +8298,15 @@
                 <a:ea typeface="Calibri" pitchFamily="34" charset="-122"/>
                 <a:cs typeface="Calibri" pitchFamily="34" charset="-120"/>
               </a:rPr>
-              <a:t>index.html records ~22,000 sq ft; the Karnal assumption block in financials.html reads '~6 acres'. The two are not reconcilable and the footprint drives the revenue ceiling. To be confirmed against the signed sub-lease before this model is bid.</a:t>
-            </a:r>
-            <a:endParaRPr lang="en-US" sz="850" dirty="0"/>
-          </a:p>
-        </p:txBody>
-      </p:sp>
-      <p:sp>
-        <p:nvSpPr>
-          <p:cNvPr id="15" name="Text 12"/>
+              <a:t>But: index.html records ~22,000 sq ft where financials.html reads ~6 acres. The footprint drives the revenue ceiling. Confirm it against the executed sub-lease before any drawdown.</a:t>
+            </a:r>
+            <a:endParaRPr lang="en-US" sz="1200" dirty="0"/>
+          </a:p>
+        </p:txBody>
+      </p:sp>
+      <p:sp>
+        <p:nvSpPr>
+          <p:cNvPr id="11" name="Text 8"/>
           <p:cNvSpPr/>
           <p:nvPr/>
         </p:nvSpPr>
@@ -8602,8 +8481,8 @@
         </p:nvSpPr>
         <p:spPr>
           <a:xfrm>
-            <a:off x="566928" y="1005840"/>
-            <a:ext cx="11057839" cy="512064"/>
+            <a:off x="566928" y="950976"/>
+            <a:ext cx="11057839" cy="462280"/>
           </a:xfrm>
           <a:prstGeom prst="rect">
             <a:avLst/>
@@ -8617,12 +8496,12 @@
           <a:p>
             <a:pPr indent="0" marL="0">
               <a:lnSpc>
-                <a:spcPts val="1900"/>
+                <a:spcPts val="1750"/>
               </a:lnSpc>
               <a:buNone/>
             </a:pPr>
             <a:r>
-              <a:rPr lang="en-US" sz="1350" dirty="0">
+              <a:rPr lang="en-US" sz="1250" dirty="0">
                 <a:solidFill>
                   <a:srgbClr val="3B4660"/>
                 </a:solidFill>
@@ -8632,7 +8511,7 @@
               </a:rPr>
               <a:t>Unlike the two concessions, every rupee here is capital. There is no revolving working-capital component to separate out — the money buys assets that stay bought.</a:t>
             </a:r>
-            <a:endParaRPr lang="en-US" sz="1350" dirty="0"/>
+            <a:endParaRPr lang="en-US" sz="1250" dirty="0"/>
           </a:p>
         </p:txBody>
       </p:sp>
@@ -8643,8 +8522,8 @@
           <p:nvPr/>
         </p:nvGraphicFramePr>
         <p:xfrm>
-          <a:off x="566928" y="1627632"/>
-          <a:ext cx="11057839" cy="2286000"/>
+          <a:off x="566928" y="1541272"/>
+          <a:ext cx="11057839" cy="1965960"/>
         </p:xfrm>
         <a:graphic xmlns:a="http://schemas.openxmlformats.org/drawingml/2006/main">
           <a:graphicData uri="http://schemas.openxmlformats.org/drawingml/2006/chart">
@@ -8660,12 +8539,12 @@
         </p:nvSpPr>
         <p:spPr>
           <a:xfrm>
-            <a:off x="566928" y="4142232"/>
-            <a:ext cx="3539642" cy="1188720"/>
+            <a:off x="566928" y="3735832"/>
+            <a:ext cx="3539642" cy="1115568"/>
           </a:xfrm>
           <a:prstGeom prst="roundRect">
             <a:avLst>
-              <a:gd name="adj" fmla="val 4615"/>
+              <a:gd name="adj" fmla="val 4918"/>
             </a:avLst>
           </a:prstGeom>
           <a:solidFill>
@@ -8687,24 +8566,24 @@
         </p:nvSpPr>
         <p:spPr>
           <a:xfrm>
-            <a:off x="749808" y="4279392"/>
-            <a:ext cx="3173882" cy="219456"/>
-          </a:xfrm>
-          <a:prstGeom prst="rect">
-            <a:avLst/>
-          </a:prstGeom>
-          <a:noFill/>
-          <a:ln/>
-        </p:spPr>
-        <p:txBody>
-          <a:bodyPr wrap="square" lIns="0" tIns="0" rIns="0" bIns="0" rtlCol="0" anchor="ctr"/>
+            <a:off x="749808" y="3854704"/>
+            <a:ext cx="3173882" cy="237744"/>
+          </a:xfrm>
+          <a:prstGeom prst="rect">
+            <a:avLst/>
+          </a:prstGeom>
+          <a:noFill/>
+          <a:ln/>
+        </p:spPr>
+        <p:txBody>
+          <a:bodyPr wrap="square" lIns="0" tIns="0" rIns="0" bIns="0" rtlCol="0" anchor="t"/>
           <a:lstStyle/>
           <a:p>
             <a:pPr indent="0" marL="0">
               <a:buNone/>
             </a:pPr>
             <a:r>
-              <a:rPr lang="en-US" sz="900" b="1" spc="120" kern="0" dirty="0">
+              <a:rPr lang="en-US" sz="850" b="1" spc="100" kern="0" dirty="0">
                 <a:solidFill>
                   <a:srgbClr val="6E7689"/>
                 </a:solidFill>
@@ -8714,7 +8593,7 @@
               </a:rPr>
               <a:t>PROJECT COST</a:t>
             </a:r>
-            <a:endParaRPr lang="en-US" sz="900" dirty="0"/>
+            <a:endParaRPr lang="en-US" sz="850" dirty="0"/>
           </a:p>
         </p:txBody>
       </p:sp>
@@ -8726,7 +8605,7 @@
         </p:nvSpPr>
         <p:spPr>
           <a:xfrm>
-            <a:off x="749808" y="4507992"/>
+            <a:off x="749808" y="4101592"/>
             <a:ext cx="3173882" cy="457200"/>
           </a:xfrm>
           <a:prstGeom prst="rect">
@@ -8736,7 +8615,9 @@
           <a:ln/>
         </p:spPr>
         <p:txBody>
-          <a:bodyPr wrap="square" lIns="0" tIns="0" rIns="0" bIns="0" rtlCol="0" anchor="t"/>
+          <a:bodyPr wrap="square" lIns="0" tIns="0" rIns="0" bIns="0" rtlCol="0" anchor="t">
+            <a:normAutofit/>
+          </a:bodyPr>
           <a:lstStyle/>
           <a:p>
             <a:pPr indent="0" marL="0">
@@ -8765,8 +8646,8 @@
         </p:nvSpPr>
         <p:spPr>
           <a:xfrm>
-            <a:off x="749808" y="4983480"/>
-            <a:ext cx="3173882" cy="274320"/>
+            <a:off x="749808" y="4577080"/>
+            <a:ext cx="3173882" cy="201168"/>
           </a:xfrm>
           <a:prstGeom prst="rect">
             <a:avLst/>
@@ -8807,12 +8688,12 @@
         </p:nvSpPr>
         <p:spPr>
           <a:xfrm>
-            <a:off x="4326026" y="4142232"/>
-            <a:ext cx="3539642" cy="1188720"/>
+            <a:off x="4326026" y="3735832"/>
+            <a:ext cx="3539642" cy="1115568"/>
           </a:xfrm>
           <a:prstGeom prst="roundRect">
             <a:avLst>
-              <a:gd name="adj" fmla="val 4615"/>
+              <a:gd name="adj" fmla="val 4918"/>
             </a:avLst>
           </a:prstGeom>
           <a:solidFill>
@@ -8834,24 +8715,24 @@
         </p:nvSpPr>
         <p:spPr>
           <a:xfrm>
-            <a:off x="4508906" y="4279392"/>
-            <a:ext cx="3173882" cy="219456"/>
-          </a:xfrm>
-          <a:prstGeom prst="rect">
-            <a:avLst/>
-          </a:prstGeom>
-          <a:noFill/>
-          <a:ln/>
-        </p:spPr>
-        <p:txBody>
-          <a:bodyPr wrap="square" lIns="0" tIns="0" rIns="0" bIns="0" rtlCol="0" anchor="ctr"/>
+            <a:off x="4508906" y="3854704"/>
+            <a:ext cx="3173882" cy="237744"/>
+          </a:xfrm>
+          <a:prstGeom prst="rect">
+            <a:avLst/>
+          </a:prstGeom>
+          <a:noFill/>
+          <a:ln/>
+        </p:spPr>
+        <p:txBody>
+          <a:bodyPr wrap="square" lIns="0" tIns="0" rIns="0" bIns="0" rtlCol="0" anchor="t"/>
           <a:lstStyle/>
           <a:p>
             <a:pPr indent="0" marL="0">
               <a:buNone/>
             </a:pPr>
             <a:r>
-              <a:rPr lang="en-US" sz="900" b="1" spc="120" kern="0" dirty="0">
+              <a:rPr lang="en-US" sz="850" b="1" spc="100" kern="0" dirty="0">
                 <a:solidFill>
                   <a:srgbClr val="6E7689"/>
                 </a:solidFill>
@@ -8861,7 +8742,7 @@
               </a:rPr>
               <a:t>PROMOTER CONTRIBUTION</a:t>
             </a:r>
-            <a:endParaRPr lang="en-US" sz="900" dirty="0"/>
+            <a:endParaRPr lang="en-US" sz="850" dirty="0"/>
           </a:p>
         </p:txBody>
       </p:sp>
@@ -8873,7 +8754,7 @@
         </p:nvSpPr>
         <p:spPr>
           <a:xfrm>
-            <a:off x="4508906" y="4507992"/>
+            <a:off x="4508906" y="4101592"/>
             <a:ext cx="3173882" cy="457200"/>
           </a:xfrm>
           <a:prstGeom prst="rect">
@@ -8883,7 +8764,9 @@
           <a:ln/>
         </p:spPr>
         <p:txBody>
-          <a:bodyPr wrap="square" lIns="0" tIns="0" rIns="0" bIns="0" rtlCol="0" anchor="t"/>
+          <a:bodyPr wrap="square" lIns="0" tIns="0" rIns="0" bIns="0" rtlCol="0" anchor="t">
+            <a:normAutofit/>
+          </a:bodyPr>
           <a:lstStyle/>
           <a:p>
             <a:pPr indent="0" marL="0">
@@ -8912,8 +8795,8 @@
         </p:nvSpPr>
         <p:spPr>
           <a:xfrm>
-            <a:off x="4508906" y="4983480"/>
-            <a:ext cx="3173882" cy="274320"/>
+            <a:off x="4508906" y="4577080"/>
+            <a:ext cx="3173882" cy="201168"/>
           </a:xfrm>
           <a:prstGeom prst="rect">
             <a:avLst/>
@@ -8954,12 +8837,12 @@
         </p:nvSpPr>
         <p:spPr>
           <a:xfrm>
-            <a:off x="8085125" y="4142232"/>
-            <a:ext cx="3539642" cy="1188720"/>
+            <a:off x="8085125" y="3735832"/>
+            <a:ext cx="3539642" cy="1115568"/>
           </a:xfrm>
           <a:prstGeom prst="roundRect">
             <a:avLst>
-              <a:gd name="adj" fmla="val 4615"/>
+              <a:gd name="adj" fmla="val 4918"/>
             </a:avLst>
           </a:prstGeom>
           <a:solidFill>
@@ -8981,24 +8864,24 @@
         </p:nvSpPr>
         <p:spPr>
           <a:xfrm>
-            <a:off x="8268005" y="4279392"/>
-            <a:ext cx="3173882" cy="219456"/>
-          </a:xfrm>
-          <a:prstGeom prst="rect">
-            <a:avLst/>
-          </a:prstGeom>
-          <a:noFill/>
-          <a:ln/>
-        </p:spPr>
-        <p:txBody>
-          <a:bodyPr wrap="square" lIns="0" tIns="0" rIns="0" bIns="0" rtlCol="0" anchor="ctr"/>
+            <a:off x="8268005" y="3854704"/>
+            <a:ext cx="3173882" cy="237744"/>
+          </a:xfrm>
+          <a:prstGeom prst="rect">
+            <a:avLst/>
+          </a:prstGeom>
+          <a:noFill/>
+          <a:ln/>
+        </p:spPr>
+        <p:txBody>
+          <a:bodyPr wrap="square" lIns="0" tIns="0" rIns="0" bIns="0" rtlCol="0" anchor="t"/>
           <a:lstStyle/>
           <a:p>
             <a:pPr indent="0" marL="0">
               <a:buNone/>
             </a:pPr>
             <a:r>
-              <a:rPr lang="en-US" sz="900" b="1" spc="120" kern="0" dirty="0">
+              <a:rPr lang="en-US" sz="850" b="1" spc="100" kern="0" dirty="0">
                 <a:solidFill>
                   <a:srgbClr val="6E7689"/>
                 </a:solidFill>
@@ -9008,7 +8891,7 @@
               </a:rPr>
               <a:t>TERM LOAN SOUGHT</a:t>
             </a:r>
-            <a:endParaRPr lang="en-US" sz="900" dirty="0"/>
+            <a:endParaRPr lang="en-US" sz="850" dirty="0"/>
           </a:p>
         </p:txBody>
       </p:sp>
@@ -9020,7 +8903,7 @@
         </p:nvSpPr>
         <p:spPr>
           <a:xfrm>
-            <a:off x="8268005" y="4507992"/>
+            <a:off x="8268005" y="4101592"/>
             <a:ext cx="3173882" cy="457200"/>
           </a:xfrm>
           <a:prstGeom prst="rect">
@@ -9030,7 +8913,9 @@
           <a:ln/>
         </p:spPr>
         <p:txBody>
-          <a:bodyPr wrap="square" lIns="0" tIns="0" rIns="0" bIns="0" rtlCol="0" anchor="t"/>
+          <a:bodyPr wrap="square" lIns="0" tIns="0" rIns="0" bIns="0" rtlCol="0" anchor="t">
+            <a:normAutofit/>
+          </a:bodyPr>
           <a:lstStyle/>
           <a:p>
             <a:pPr indent="0" marL="0">
@@ -9059,8 +8944,8 @@
         </p:nvSpPr>
         <p:spPr>
           <a:xfrm>
-            <a:off x="8268005" y="4983480"/>
-            <a:ext cx="3173882" cy="274320"/>
+            <a:off x="8268005" y="4577080"/>
+            <a:ext cx="3173882" cy="201168"/>
           </a:xfrm>
           <a:prstGeom prst="rect">
             <a:avLst/>
@@ -9101,12 +8986,12 @@
         </p:nvSpPr>
         <p:spPr>
           <a:xfrm>
-            <a:off x="566928" y="5586984"/>
-            <a:ext cx="11057839" cy="731520"/>
+            <a:off x="566928" y="5107432"/>
+            <a:ext cx="11057839" cy="1234664"/>
           </a:xfrm>
           <a:prstGeom prst="roundRect">
             <a:avLst>
-              <a:gd name="adj" fmla="val 6250"/>
+              <a:gd name="adj" fmla="val 3703"/>
             </a:avLst>
           </a:prstGeom>
           <a:solidFill>
@@ -9128,8 +9013,8 @@
         </p:nvSpPr>
         <p:spPr>
           <a:xfrm>
-            <a:off x="804672" y="5733288"/>
-            <a:ext cx="2743200" cy="201168"/>
+            <a:off x="804672" y="5217160"/>
+            <a:ext cx="2743200" cy="182880"/>
           </a:xfrm>
           <a:prstGeom prst="rect">
             <a:avLst/>
@@ -9167,8 +9052,8 @@
         </p:nvSpPr>
         <p:spPr>
           <a:xfrm>
-            <a:off x="804672" y="5934456"/>
-            <a:ext cx="10582351" cy="232220"/>
+            <a:off x="804672" y="5400040"/>
+            <a:ext cx="10582351" cy="273406"/>
           </a:xfrm>
           <a:prstGeom prst="rect">
             <a:avLst/>
@@ -9182,12 +9067,12 @@
           <a:p>
             <a:pPr indent="0" marL="0">
               <a:lnSpc>
-                <a:spcPts val="1725"/>
+                <a:spcPts val="2070"/>
               </a:lnSpc>
               <a:buNone/>
             </a:pPr>
             <a:r>
-              <a:rPr lang="en-US" sz="1500" b="1" dirty="0">
+              <a:rPr lang="en-US" sz="1800" b="1" dirty="0">
                 <a:solidFill>
                   <a:srgbClr val="0A1426"/>
                 </a:solidFill>
@@ -9197,7 +9082,7 @@
               </a:rPr>
               <a:t>This is already funded in the existing plan — the question is how</a:t>
             </a:r>
-            <a:endParaRPr lang="en-US" sz="1500" dirty="0"/>
+            <a:endParaRPr lang="en-US" sz="1800" dirty="0"/>
           </a:p>
         </p:txBody>
       </p:sp>
@@ -9209,8 +9094,8 @@
         </p:nvSpPr>
         <p:spPr>
           <a:xfrm>
-            <a:off x="804672" y="6239827"/>
-            <a:ext cx="10582351" cy="182880"/>
+            <a:off x="804672" y="5728310"/>
+            <a:ext cx="10582351" cy="540634"/>
           </a:xfrm>
           <a:prstGeom prst="rect">
             <a:avLst/>
@@ -9224,12 +9109,12 @@
           <a:p>
             <a:pPr indent="0" marL="0">
               <a:lnSpc>
-                <a:spcPts val="1207"/>
+                <a:spcPts val="1562"/>
               </a:lnSpc>
               <a:buNone/>
             </a:pPr>
             <a:r>
-              <a:rPr lang="en-US" sz="850" dirty="0">
+              <a:rPr lang="en-US" sz="1100" dirty="0">
                 <a:solidFill>
                   <a:srgbClr val="3B4660"/>
                 </a:solidFill>
@@ -9237,9 +9122,9 @@
                 <a:ea typeface="Calibri" pitchFamily="34" charset="-122"/>
                 <a:cs typeface="Calibri" pitchFamily="34" charset="-120"/>
               </a:rPr>
-              <a:t>The ₹10 crore equity round earmarks ₹4 crore for Karnal Phase 1. On these numbers that is not the cheapest way to fund it: the project earns 19.5% against 12.50% guaranteed debt. Funding Karnal with debt frees ₹4 crore of the round for the parks that cannot be debt-funded — or reduces the round, and the dilution, by the same amount.</a:t>
-            </a:r>
-            <a:endParaRPr lang="en-US" sz="850" dirty="0"/>
+              <a:t>The round earmarks ₹4 crore for Karnal. On these numbers that is not the cheapest way: the project earns 19.5% against 12.50% guaranteed debt. Debt-funding it frees that ₹4 crore for the parks with no debt route.</a:t>
+            </a:r>
+            <a:endParaRPr lang="en-US" sz="1100" dirty="0"/>
           </a:p>
         </p:txBody>
       </p:sp>
@@ -9420,8 +9305,8 @@
         </p:nvSpPr>
         <p:spPr>
           <a:xfrm>
-            <a:off x="566928" y="1005840"/>
-            <a:ext cx="11057839" cy="512064"/>
+            <a:off x="566928" y="950976"/>
+            <a:ext cx="11057839" cy="462280"/>
           </a:xfrm>
           <a:prstGeom prst="rect">
             <a:avLst/>
@@ -9435,12 +9320,12 @@
           <a:p>
             <a:pPr indent="0" marL="0">
               <a:lnSpc>
-                <a:spcPts val="1900"/>
+                <a:spcPts val="1750"/>
               </a:lnSpc>
               <a:buNone/>
             </a:pPr>
             <a:r>
-              <a:rPr lang="en-US" sz="1350" dirty="0">
+              <a:rPr lang="en-US" sz="1250" dirty="0">
                 <a:solidFill>
                   <a:srgbClr val="3B4660"/>
                 </a:solidFill>
@@ -9450,7 +9335,7 @@
               </a:rPr>
               <a:t>Revenue follows the range published in the company financial model: ₹0.50–1.00 crore in the FY27-28 stub half-year, ₹3.00–4.00 crore in the first full year. Midpoints used throughout.</a:t>
             </a:r>
-            <a:endParaRPr lang="en-US" sz="1350" dirty="0"/>
+            <a:endParaRPr lang="en-US" sz="1250" dirty="0"/>
           </a:p>
         </p:txBody>
       </p:sp>
@@ -9461,8 +9346,8 @@
           <p:nvPr/>
         </p:nvGraphicFramePr>
         <p:xfrm>
-          <a:off x="566928" y="1627632"/>
-          <a:ext cx="11057839" cy="2834640"/>
+          <a:off x="566928" y="1541272"/>
+          <a:ext cx="11057839" cy="2514600"/>
         </p:xfrm>
         <a:graphic xmlns:a="http://schemas.openxmlformats.org/drawingml/2006/main">
           <a:graphicData uri="http://schemas.openxmlformats.org/drawingml/2006/chart">
@@ -9478,12 +9363,12 @@
         </p:nvSpPr>
         <p:spPr>
           <a:xfrm>
-            <a:off x="566928" y="4690872"/>
-            <a:ext cx="3539642" cy="1188720"/>
+            <a:off x="566928" y="4284472"/>
+            <a:ext cx="3539642" cy="1115568"/>
           </a:xfrm>
           <a:prstGeom prst="roundRect">
             <a:avLst>
-              <a:gd name="adj" fmla="val 4615"/>
+              <a:gd name="adj" fmla="val 4918"/>
             </a:avLst>
           </a:prstGeom>
           <a:solidFill>
@@ -9505,24 +9390,24 @@
         </p:nvSpPr>
         <p:spPr>
           <a:xfrm>
-            <a:off x="749808" y="4828032"/>
-            <a:ext cx="3173882" cy="219456"/>
-          </a:xfrm>
-          <a:prstGeom prst="rect">
-            <a:avLst/>
-          </a:prstGeom>
-          <a:noFill/>
-          <a:ln/>
-        </p:spPr>
-        <p:txBody>
-          <a:bodyPr wrap="square" lIns="0" tIns="0" rIns="0" bIns="0" rtlCol="0" anchor="ctr"/>
+            <a:off x="749808" y="4403344"/>
+            <a:ext cx="3173882" cy="237744"/>
+          </a:xfrm>
+          <a:prstGeom prst="rect">
+            <a:avLst/>
+          </a:prstGeom>
+          <a:noFill/>
+          <a:ln/>
+        </p:spPr>
+        <p:txBody>
+          <a:bodyPr wrap="square" lIns="0" tIns="0" rIns="0" bIns="0" rtlCol="0" anchor="t"/>
           <a:lstStyle/>
           <a:p>
             <a:pPr indent="0" marL="0">
               <a:buNone/>
             </a:pPr>
             <a:r>
-              <a:rPr lang="en-US" sz="900" b="1" spc="120" kern="0" dirty="0">
+              <a:rPr lang="en-US" sz="850" b="1" spc="100" kern="0" dirty="0">
                 <a:solidFill>
                   <a:srgbClr val="6E7689"/>
                 </a:solidFill>
@@ -9532,7 +9417,7 @@
               </a:rPr>
               <a:t>FIRST FULL YEAR</a:t>
             </a:r>
-            <a:endParaRPr lang="en-US" sz="900" dirty="0"/>
+            <a:endParaRPr lang="en-US" sz="850" dirty="0"/>
           </a:p>
         </p:txBody>
       </p:sp>
@@ -9544,7 +9429,7 @@
         </p:nvSpPr>
         <p:spPr>
           <a:xfrm>
-            <a:off x="749808" y="5056632"/>
+            <a:off x="749808" y="4650232"/>
             <a:ext cx="3173882" cy="457200"/>
           </a:xfrm>
           <a:prstGeom prst="rect">
@@ -9554,7 +9439,9 @@
           <a:ln/>
         </p:spPr>
         <p:txBody>
-          <a:bodyPr wrap="square" lIns="0" tIns="0" rIns="0" bIns="0" rtlCol="0" anchor="t"/>
+          <a:bodyPr wrap="square" lIns="0" tIns="0" rIns="0" bIns="0" rtlCol="0" anchor="t">
+            <a:normAutofit/>
+          </a:bodyPr>
           <a:lstStyle/>
           <a:p>
             <a:pPr indent="0" marL="0">
@@ -9583,8 +9470,8 @@
         </p:nvSpPr>
         <p:spPr>
           <a:xfrm>
-            <a:off x="749808" y="5532120"/>
-            <a:ext cx="3173882" cy="274320"/>
+            <a:off x="749808" y="5125720"/>
+            <a:ext cx="3173882" cy="201168"/>
           </a:xfrm>
           <a:prstGeom prst="rect">
             <a:avLst/>
@@ -9625,12 +9512,12 @@
         </p:nvSpPr>
         <p:spPr>
           <a:xfrm>
-            <a:off x="4326026" y="4690872"/>
-            <a:ext cx="3539642" cy="1188720"/>
+            <a:off x="4326026" y="4284472"/>
+            <a:ext cx="3539642" cy="1115568"/>
           </a:xfrm>
           <a:prstGeom prst="roundRect">
             <a:avLst>
-              <a:gd name="adj" fmla="val 4615"/>
+              <a:gd name="adj" fmla="val 4918"/>
             </a:avLst>
           </a:prstGeom>
           <a:solidFill>
@@ -9652,24 +9539,24 @@
         </p:nvSpPr>
         <p:spPr>
           <a:xfrm>
-            <a:off x="4508906" y="4828032"/>
-            <a:ext cx="3173882" cy="219456"/>
-          </a:xfrm>
-          <a:prstGeom prst="rect">
-            <a:avLst/>
-          </a:prstGeom>
-          <a:noFill/>
-          <a:ln/>
-        </p:spPr>
-        <p:txBody>
-          <a:bodyPr wrap="square" lIns="0" tIns="0" rIns="0" bIns="0" rtlCol="0" anchor="ctr"/>
+            <a:off x="4508906" y="4403344"/>
+            <a:ext cx="3173882" cy="237744"/>
+          </a:xfrm>
+          <a:prstGeom prst="rect">
+            <a:avLst/>
+          </a:prstGeom>
+          <a:noFill/>
+          <a:ln/>
+        </p:spPr>
+        <p:txBody>
+          <a:bodyPr wrap="square" lIns="0" tIns="0" rIns="0" bIns="0" rtlCol="0" anchor="t"/>
           <a:lstStyle/>
           <a:p>
             <a:pPr indent="0" marL="0">
               <a:buNone/>
             </a:pPr>
             <a:r>
-              <a:rPr lang="en-US" sz="900" b="1" spc="120" kern="0" dirty="0">
+              <a:rPr lang="en-US" sz="850" b="1" spc="100" kern="0" dirty="0">
                 <a:solidFill>
                   <a:srgbClr val="6E7689"/>
                 </a:solidFill>
@@ -9679,7 +9566,7 @@
               </a:rPr>
               <a:t>MARGIN AT YEAR 5</a:t>
             </a:r>
-            <a:endParaRPr lang="en-US" sz="900" dirty="0"/>
+            <a:endParaRPr lang="en-US" sz="850" dirty="0"/>
           </a:p>
         </p:txBody>
       </p:sp>
@@ -9691,7 +9578,7 @@
         </p:nvSpPr>
         <p:spPr>
           <a:xfrm>
-            <a:off x="4508906" y="5056632"/>
+            <a:off x="4508906" y="4650232"/>
             <a:ext cx="3173882" cy="457200"/>
           </a:xfrm>
           <a:prstGeom prst="rect">
@@ -9701,7 +9588,9 @@
           <a:ln/>
         </p:spPr>
         <p:txBody>
-          <a:bodyPr wrap="square" lIns="0" tIns="0" rIns="0" bIns="0" rtlCol="0" anchor="t"/>
+          <a:bodyPr wrap="square" lIns="0" tIns="0" rIns="0" bIns="0" rtlCol="0" anchor="t">
+            <a:normAutofit/>
+          </a:bodyPr>
           <a:lstStyle/>
           <a:p>
             <a:pPr indent="0" marL="0">
@@ -9730,8 +9619,8 @@
         </p:nvSpPr>
         <p:spPr>
           <a:xfrm>
-            <a:off x="4508906" y="5532120"/>
-            <a:ext cx="3173882" cy="274320"/>
+            <a:off x="4508906" y="5125720"/>
+            <a:ext cx="3173882" cy="201168"/>
           </a:xfrm>
           <a:prstGeom prst="rect">
             <a:avLst/>
@@ -9772,12 +9661,12 @@
         </p:nvSpPr>
         <p:spPr>
           <a:xfrm>
-            <a:off x="8085125" y="4690872"/>
-            <a:ext cx="3539642" cy="1188720"/>
+            <a:off x="8085125" y="4284472"/>
+            <a:ext cx="3539642" cy="1115568"/>
           </a:xfrm>
           <a:prstGeom prst="roundRect">
             <a:avLst>
-              <a:gd name="adj" fmla="val 4615"/>
+              <a:gd name="adj" fmla="val 4918"/>
             </a:avLst>
           </a:prstGeom>
           <a:solidFill>
@@ -9799,24 +9688,24 @@
         </p:nvSpPr>
         <p:spPr>
           <a:xfrm>
-            <a:off x="8268005" y="4828032"/>
-            <a:ext cx="3173882" cy="219456"/>
-          </a:xfrm>
-          <a:prstGeom prst="rect">
-            <a:avLst/>
-          </a:prstGeom>
-          <a:noFill/>
-          <a:ln/>
-        </p:spPr>
-        <p:txBody>
-          <a:bodyPr wrap="square" lIns="0" tIns="0" rIns="0" bIns="0" rtlCol="0" anchor="ctr"/>
+            <a:off x="8268005" y="4403344"/>
+            <a:ext cx="3173882" cy="237744"/>
+          </a:xfrm>
+          <a:prstGeom prst="rect">
+            <a:avLst/>
+          </a:prstGeom>
+          <a:noFill/>
+          <a:ln/>
+        </p:spPr>
+        <p:txBody>
+          <a:bodyPr wrap="square" lIns="0" tIns="0" rIns="0" bIns="0" rtlCol="0" anchor="t"/>
           <a:lstStyle/>
           <a:p>
             <a:pPr indent="0" marL="0">
               <a:buNone/>
             </a:pPr>
             <a:r>
-              <a:rPr lang="en-US" sz="900" b="1" spc="120" kern="0" dirty="0">
+              <a:rPr lang="en-US" sz="850" b="1" spc="100" kern="0" dirty="0">
                 <a:solidFill>
                   <a:srgbClr val="6E7689"/>
                 </a:solidFill>
@@ -9826,7 +9715,7 @@
               </a:rPr>
               <a:t>YEAR 10 EBITDA</a:t>
             </a:r>
-            <a:endParaRPr lang="en-US" sz="900" dirty="0"/>
+            <a:endParaRPr lang="en-US" sz="850" dirty="0"/>
           </a:p>
         </p:txBody>
       </p:sp>
@@ -9838,7 +9727,7 @@
         </p:nvSpPr>
         <p:spPr>
           <a:xfrm>
-            <a:off x="8268005" y="5056632"/>
+            <a:off x="8268005" y="4650232"/>
             <a:ext cx="3173882" cy="457200"/>
           </a:xfrm>
           <a:prstGeom prst="rect">
@@ -9848,7 +9737,9 @@
           <a:ln/>
         </p:spPr>
         <p:txBody>
-          <a:bodyPr wrap="square" lIns="0" tIns="0" rIns="0" bIns="0" rtlCol="0" anchor="t"/>
+          <a:bodyPr wrap="square" lIns="0" tIns="0" rIns="0" bIns="0" rtlCol="0" anchor="t">
+            <a:normAutofit/>
+          </a:bodyPr>
           <a:lstStyle/>
           <a:p>
             <a:pPr indent="0" marL="0">
@@ -9877,8 +9768,8 @@
         </p:nvSpPr>
         <p:spPr>
           <a:xfrm>
-            <a:off x="8268005" y="5532120"/>
-            <a:ext cx="3173882" cy="274320"/>
+            <a:off x="8268005" y="5125720"/>
+            <a:ext cx="3173882" cy="201168"/>
           </a:xfrm>
           <a:prstGeom prst="rect">
             <a:avLst/>
@@ -10035,7 +9926,7 @@
                 <a:ea typeface="Calibri" pitchFamily="34" charset="-122"/>
                 <a:cs typeface="Calibri" pitchFamily="34" charset="-120"/>
               </a:rPr>
-              <a:t>06</a:t>
+              <a:t>04</a:t>
             </a:r>
             <a:endParaRPr lang="en-US" sz="1300" dirty="0"/>
           </a:p>
@@ -10088,8 +9979,8 @@
         </p:nvSpPr>
         <p:spPr>
           <a:xfrm>
-            <a:off x="566928" y="1005840"/>
-            <a:ext cx="11057839" cy="512064"/>
+            <a:off x="566928" y="950976"/>
+            <a:ext cx="11057839" cy="462280"/>
           </a:xfrm>
           <a:prstGeom prst="rect">
             <a:avLst/>
@@ -10103,12 +9994,12 @@
           <a:p>
             <a:pPr indent="0" marL="0">
               <a:lnSpc>
-                <a:spcPts val="1900"/>
+                <a:spcPts val="1750"/>
               </a:lnSpc>
               <a:buNone/>
             </a:pPr>
             <a:r>
-              <a:rPr lang="en-US" sz="1350" dirty="0">
+              <a:rPr lang="en-US" sz="1250" dirty="0">
                 <a:solidFill>
                   <a:srgbClr val="3B4660"/>
                 </a:solidFill>
@@ -10118,7 +10009,7 @@
               </a:rPr>
               <a:t>Unlevered free cash flow to the project. Capital deployed is the true project cost — the revolving opex facility is financing, not project cost, so it is excluded here.</a:t>
             </a:r>
-            <a:endParaRPr lang="en-US" sz="1350" dirty="0"/>
+            <a:endParaRPr lang="en-US" sz="1250" dirty="0"/>
           </a:p>
         </p:txBody>
       </p:sp>
@@ -10129,8 +10020,8 @@
           <p:nvPr/>
         </p:nvGraphicFramePr>
         <p:xfrm>
-          <a:off x="566928" y="1627632"/>
-          <a:ext cx="11057839" cy="2514600"/>
+          <a:off x="566928" y="1541272"/>
+          <a:ext cx="11057839" cy="2194560"/>
         </p:xfrm>
         <a:graphic xmlns:a="http://schemas.openxmlformats.org/drawingml/2006/main">
           <a:graphicData uri="http://schemas.openxmlformats.org/drawingml/2006/chart">
@@ -10146,12 +10037,12 @@
         </p:nvSpPr>
         <p:spPr>
           <a:xfrm>
-            <a:off x="566928" y="4370832"/>
-            <a:ext cx="2599868" cy="1280160"/>
+            <a:off x="566928" y="3964432"/>
+            <a:ext cx="2599868" cy="1207008"/>
           </a:xfrm>
           <a:prstGeom prst="roundRect">
             <a:avLst>
-              <a:gd name="adj" fmla="val 4286"/>
+              <a:gd name="adj" fmla="val 4545"/>
             </a:avLst>
           </a:prstGeom>
           <a:solidFill>
@@ -10173,24 +10064,24 @@
         </p:nvSpPr>
         <p:spPr>
           <a:xfrm>
-            <a:off x="749808" y="4507992"/>
-            <a:ext cx="2234108" cy="219456"/>
-          </a:xfrm>
-          <a:prstGeom prst="rect">
-            <a:avLst/>
-          </a:prstGeom>
-          <a:noFill/>
-          <a:ln/>
-        </p:spPr>
-        <p:txBody>
-          <a:bodyPr wrap="square" lIns="0" tIns="0" rIns="0" bIns="0" rtlCol="0" anchor="ctr"/>
+            <a:off x="749808" y="4083304"/>
+            <a:ext cx="2234108" cy="237744"/>
+          </a:xfrm>
+          <a:prstGeom prst="rect">
+            <a:avLst/>
+          </a:prstGeom>
+          <a:noFill/>
+          <a:ln/>
+        </p:spPr>
+        <p:txBody>
+          <a:bodyPr wrap="square" lIns="0" tIns="0" rIns="0" bIns="0" rtlCol="0" anchor="t"/>
           <a:lstStyle/>
           <a:p>
             <a:pPr indent="0" marL="0">
               <a:buNone/>
             </a:pPr>
             <a:r>
-              <a:rPr lang="en-US" sz="900" b="1" spc="120" kern="0" dirty="0">
+              <a:rPr lang="en-US" sz="850" b="1" spc="100" kern="0" dirty="0">
                 <a:solidFill>
                   <a:srgbClr val="6E7689"/>
                 </a:solidFill>
@@ -10200,7 +10091,7 @@
               </a:rPr>
               <a:t>PROJECT IRR</a:t>
             </a:r>
-            <a:endParaRPr lang="en-US" sz="900" dirty="0"/>
+            <a:endParaRPr lang="en-US" sz="850" dirty="0"/>
           </a:p>
         </p:txBody>
       </p:sp>
@@ -10212,7 +10103,7 @@
         </p:nvSpPr>
         <p:spPr>
           <a:xfrm>
-            <a:off x="749808" y="4736592"/>
+            <a:off x="749808" y="4330192"/>
             <a:ext cx="2234108" cy="457200"/>
           </a:xfrm>
           <a:prstGeom prst="rect">
@@ -10222,7 +10113,9 @@
           <a:ln/>
         </p:spPr>
         <p:txBody>
-          <a:bodyPr wrap="square" lIns="0" tIns="0" rIns="0" bIns="0" rtlCol="0" anchor="t"/>
+          <a:bodyPr wrap="square" lIns="0" tIns="0" rIns="0" bIns="0" rtlCol="0" anchor="t">
+            <a:normAutofit/>
+          </a:bodyPr>
           <a:lstStyle/>
           <a:p>
             <a:pPr indent="0" marL="0">
@@ -10251,8 +10144,8 @@
         </p:nvSpPr>
         <p:spPr>
           <a:xfrm>
-            <a:off x="749808" y="5212080"/>
-            <a:ext cx="2234108" cy="365760"/>
+            <a:off x="749808" y="4805680"/>
+            <a:ext cx="2234108" cy="292608"/>
           </a:xfrm>
           <a:prstGeom prst="rect">
             <a:avLst/>
@@ -10293,12 +10186,12 @@
         </p:nvSpPr>
         <p:spPr>
           <a:xfrm>
-            <a:off x="3386252" y="4370832"/>
-            <a:ext cx="2599868" cy="1280160"/>
+            <a:off x="3386252" y="3964432"/>
+            <a:ext cx="2599868" cy="1207008"/>
           </a:xfrm>
           <a:prstGeom prst="roundRect">
             <a:avLst>
-              <a:gd name="adj" fmla="val 4286"/>
+              <a:gd name="adj" fmla="val 4545"/>
             </a:avLst>
           </a:prstGeom>
           <a:solidFill>
@@ -10320,24 +10213,24 @@
         </p:nvSpPr>
         <p:spPr>
           <a:xfrm>
-            <a:off x="3569132" y="4507992"/>
-            <a:ext cx="2234108" cy="219456"/>
-          </a:xfrm>
-          <a:prstGeom prst="rect">
-            <a:avLst/>
-          </a:prstGeom>
-          <a:noFill/>
-          <a:ln/>
-        </p:spPr>
-        <p:txBody>
-          <a:bodyPr wrap="square" lIns="0" tIns="0" rIns="0" bIns="0" rtlCol="0" anchor="ctr"/>
+            <a:off x="3569132" y="4083304"/>
+            <a:ext cx="2234108" cy="237744"/>
+          </a:xfrm>
+          <a:prstGeom prst="rect">
+            <a:avLst/>
+          </a:prstGeom>
+          <a:noFill/>
+          <a:ln/>
+        </p:spPr>
+        <p:txBody>
+          <a:bodyPr wrap="square" lIns="0" tIns="0" rIns="0" bIns="0" rtlCol="0" anchor="t"/>
           <a:lstStyle/>
           <a:p>
             <a:pPr indent="0" marL="0">
               <a:buNone/>
             </a:pPr>
             <a:r>
-              <a:rPr lang="en-US" sz="900" b="1" spc="120" kern="0" dirty="0">
+              <a:rPr lang="en-US" sz="850" b="1" spc="100" kern="0" dirty="0">
                 <a:solidFill>
                   <a:srgbClr val="6E7689"/>
                 </a:solidFill>
@@ -10347,7 +10240,7 @@
               </a:rPr>
               <a:t>PAYBACK</a:t>
             </a:r>
-            <a:endParaRPr lang="en-US" sz="900" dirty="0"/>
+            <a:endParaRPr lang="en-US" sz="850" dirty="0"/>
           </a:p>
         </p:txBody>
       </p:sp>
@@ -10359,7 +10252,7 @@
         </p:nvSpPr>
         <p:spPr>
           <a:xfrm>
-            <a:off x="3569132" y="4736592"/>
+            <a:off x="3569132" y="4330192"/>
             <a:ext cx="2234108" cy="457200"/>
           </a:xfrm>
           <a:prstGeom prst="rect">
@@ -10369,7 +10262,9 @@
           <a:ln/>
         </p:spPr>
         <p:txBody>
-          <a:bodyPr wrap="square" lIns="0" tIns="0" rIns="0" bIns="0" rtlCol="0" anchor="t"/>
+          <a:bodyPr wrap="square" lIns="0" tIns="0" rIns="0" bIns="0" rtlCol="0" anchor="t">
+            <a:normAutofit/>
+          </a:bodyPr>
           <a:lstStyle/>
           <a:p>
             <a:pPr indent="0" marL="0">
@@ -10398,8 +10293,8 @@
         </p:nvSpPr>
         <p:spPr>
           <a:xfrm>
-            <a:off x="3569132" y="5212080"/>
-            <a:ext cx="2234108" cy="365760"/>
+            <a:off x="3569132" y="4805680"/>
+            <a:ext cx="2234108" cy="292608"/>
           </a:xfrm>
           <a:prstGeom prst="rect">
             <a:avLst/>
@@ -10440,12 +10335,12 @@
         </p:nvSpPr>
         <p:spPr>
           <a:xfrm>
-            <a:off x="6205576" y="4370832"/>
-            <a:ext cx="2599868" cy="1280160"/>
+            <a:off x="6205576" y="3964432"/>
+            <a:ext cx="2599868" cy="1207008"/>
           </a:xfrm>
           <a:prstGeom prst="roundRect">
             <a:avLst>
-              <a:gd name="adj" fmla="val 4286"/>
+              <a:gd name="adj" fmla="val 4545"/>
             </a:avLst>
           </a:prstGeom>
           <a:solidFill>
@@ -10467,24 +10362,24 @@
         </p:nvSpPr>
         <p:spPr>
           <a:xfrm>
-            <a:off x="6388456" y="4507992"/>
-            <a:ext cx="2234108" cy="219456"/>
-          </a:xfrm>
-          <a:prstGeom prst="rect">
-            <a:avLst/>
-          </a:prstGeom>
-          <a:noFill/>
-          <a:ln/>
-        </p:spPr>
-        <p:txBody>
-          <a:bodyPr wrap="square" lIns="0" tIns="0" rIns="0" bIns="0" rtlCol="0" anchor="ctr"/>
+            <a:off x="6388456" y="4083304"/>
+            <a:ext cx="2234108" cy="237744"/>
+          </a:xfrm>
+          <a:prstGeom prst="rect">
+            <a:avLst/>
+          </a:prstGeom>
+          <a:noFill/>
+          <a:ln/>
+        </p:spPr>
+        <p:txBody>
+          <a:bodyPr wrap="square" lIns="0" tIns="0" rIns="0" bIns="0" rtlCol="0" anchor="t"/>
           <a:lstStyle/>
           <a:p>
             <a:pPr indent="0" marL="0">
               <a:buNone/>
             </a:pPr>
             <a:r>
-              <a:rPr lang="en-US" sz="900" b="1" spc="120" kern="0" dirty="0">
+              <a:rPr lang="en-US" sz="850" b="1" spc="100" kern="0" dirty="0">
                 <a:solidFill>
                   <a:srgbClr val="6E7689"/>
                 </a:solidFill>
@@ -10494,7 +10389,7 @@
               </a:rPr>
               <a:t>ALL-IN COST OF CGTMSE DEBT</a:t>
             </a:r>
-            <a:endParaRPr lang="en-US" sz="900" dirty="0"/>
+            <a:endParaRPr lang="en-US" sz="850" dirty="0"/>
           </a:p>
         </p:txBody>
       </p:sp>
@@ -10506,7 +10401,7 @@
         </p:nvSpPr>
         <p:spPr>
           <a:xfrm>
-            <a:off x="6388456" y="4736592"/>
+            <a:off x="6388456" y="4330192"/>
             <a:ext cx="2234108" cy="457200"/>
           </a:xfrm>
           <a:prstGeom prst="rect">
@@ -10516,7 +10411,9 @@
           <a:ln/>
         </p:spPr>
         <p:txBody>
-          <a:bodyPr wrap="square" lIns="0" tIns="0" rIns="0" bIns="0" rtlCol="0" anchor="t"/>
+          <a:bodyPr wrap="square" lIns="0" tIns="0" rIns="0" bIns="0" rtlCol="0" anchor="t">
+            <a:normAutofit/>
+          </a:bodyPr>
           <a:lstStyle/>
           <a:p>
             <a:pPr indent="0" marL="0">
@@ -10545,8 +10442,8 @@
         </p:nvSpPr>
         <p:spPr>
           <a:xfrm>
-            <a:off x="6388456" y="5212080"/>
-            <a:ext cx="2234108" cy="365760"/>
+            <a:off x="6388456" y="4805680"/>
+            <a:ext cx="2234108" cy="292608"/>
           </a:xfrm>
           <a:prstGeom prst="rect">
             <a:avLst/>
@@ -10587,12 +10484,12 @@
         </p:nvSpPr>
         <p:spPr>
           <a:xfrm>
-            <a:off x="9024899" y="4370832"/>
-            <a:ext cx="2599868" cy="1280160"/>
+            <a:off x="9024899" y="3964432"/>
+            <a:ext cx="2599868" cy="1207008"/>
           </a:xfrm>
           <a:prstGeom prst="roundRect">
             <a:avLst>
-              <a:gd name="adj" fmla="val 4286"/>
+              <a:gd name="adj" fmla="val 4545"/>
             </a:avLst>
           </a:prstGeom>
           <a:solidFill>
@@ -10614,24 +10511,24 @@
         </p:nvSpPr>
         <p:spPr>
           <a:xfrm>
-            <a:off x="9207779" y="4507992"/>
-            <a:ext cx="2234108" cy="219456"/>
-          </a:xfrm>
-          <a:prstGeom prst="rect">
-            <a:avLst/>
-          </a:prstGeom>
-          <a:noFill/>
-          <a:ln/>
-        </p:spPr>
-        <p:txBody>
-          <a:bodyPr wrap="square" lIns="0" tIns="0" rIns="0" bIns="0" rtlCol="0" anchor="ctr"/>
+            <a:off x="9207779" y="4083304"/>
+            <a:ext cx="2234108" cy="237744"/>
+          </a:xfrm>
+          <a:prstGeom prst="rect">
+            <a:avLst/>
+          </a:prstGeom>
+          <a:noFill/>
+          <a:ln/>
+        </p:spPr>
+        <p:txBody>
+          <a:bodyPr wrap="square" lIns="0" tIns="0" rIns="0" bIns="0" rtlCol="0" anchor="t"/>
           <a:lstStyle/>
           <a:p>
             <a:pPr indent="0" marL="0">
               <a:buNone/>
             </a:pPr>
             <a:r>
-              <a:rPr lang="en-US" sz="900" b="1" spc="120" kern="0" dirty="0">
+              <a:rPr lang="en-US" sz="850" b="1" spc="100" kern="0" dirty="0">
                 <a:solidFill>
                   <a:srgbClr val="6E7689"/>
                 </a:solidFill>
@@ -10641,7 +10538,7 @@
               </a:rPr>
               <a:t>SPREAD OVER DEBT</a:t>
             </a:r>
-            <a:endParaRPr lang="en-US" sz="900" dirty="0"/>
+            <a:endParaRPr lang="en-US" sz="850" dirty="0"/>
           </a:p>
         </p:txBody>
       </p:sp>
@@ -10653,7 +10550,7 @@
         </p:nvSpPr>
         <p:spPr>
           <a:xfrm>
-            <a:off x="9207779" y="4736592"/>
+            <a:off x="9207779" y="4330192"/>
             <a:ext cx="2234108" cy="457200"/>
           </a:xfrm>
           <a:prstGeom prst="rect">
@@ -10663,7 +10560,9 @@
           <a:ln/>
         </p:spPr>
         <p:txBody>
-          <a:bodyPr wrap="square" lIns="0" tIns="0" rIns="0" bIns="0" rtlCol="0" anchor="t"/>
+          <a:bodyPr wrap="square" lIns="0" tIns="0" rIns="0" bIns="0" rtlCol="0" anchor="t">
+            <a:normAutofit/>
+          </a:bodyPr>
           <a:lstStyle/>
           <a:p>
             <a:pPr indent="0" marL="0">
@@ -10692,8 +10591,8 @@
         </p:nvSpPr>
         <p:spPr>
           <a:xfrm>
-            <a:off x="9207779" y="5212080"/>
-            <a:ext cx="2234108" cy="365760"/>
+            <a:off x="9207779" y="4805680"/>
+            <a:ext cx="2234108" cy="292608"/>
           </a:xfrm>
           <a:prstGeom prst="rect">
             <a:avLst/>
@@ -10850,7 +10749,7 @@
                 <a:ea typeface="Calibri" pitchFamily="34" charset="-122"/>
                 <a:cs typeface="Calibri" pitchFamily="34" charset="-120"/>
               </a:rPr>
-              <a:t>07</a:t>
+              <a:t>05</a:t>
             </a:r>
             <a:endParaRPr lang="en-US" sz="1300" dirty="0"/>
           </a:p>
@@ -10903,8 +10802,8 @@
         </p:nvSpPr>
         <p:spPr>
           <a:xfrm>
-            <a:off x="566928" y="1005840"/>
-            <a:ext cx="11057839" cy="512064"/>
+            <a:off x="566928" y="950976"/>
+            <a:ext cx="11057839" cy="462280"/>
           </a:xfrm>
           <a:prstGeom prst="rect">
             <a:avLst/>
@@ -10918,12 +10817,12 @@
           <a:p>
             <a:pPr indent="0" marL="0">
               <a:lnSpc>
-                <a:spcPts val="1900"/>
+                <a:spcPts val="1750"/>
               </a:lnSpc>
               <a:buNone/>
             </a:pPr>
             <a:r>
-              <a:rPr lang="en-US" sz="1350" dirty="0">
+              <a:rPr lang="en-US" sz="1250" dirty="0">
                 <a:solidFill>
                   <a:srgbClr val="3B4660"/>
                 </a:solidFill>
@@ -10933,7 +10832,7 @@
               </a:rPr>
               <a:t>The revenue range in the company financial model is ₹3–4 crore for the first full year. Base is the midpoint; downside sits below the published floor.</a:t>
             </a:r>
-            <a:endParaRPr lang="en-US" sz="1350" dirty="0"/>
+            <a:endParaRPr lang="en-US" sz="1250" dirty="0"/>
           </a:p>
         </p:txBody>
       </p:sp>
@@ -10944,8 +10843,8 @@
           <p:nvPr/>
         </p:nvGraphicFramePr>
         <p:xfrm>
-          <a:off x="566928" y="1627632"/>
-          <a:ext cx="11057839" cy="2286000"/>
+          <a:off x="566928" y="1541272"/>
+          <a:ext cx="11057839" cy="1965960"/>
         </p:xfrm>
         <a:graphic xmlns:a="http://schemas.openxmlformats.org/drawingml/2006/main">
           <a:graphicData uri="http://schemas.openxmlformats.org/drawingml/2006/chart">
@@ -10968,7 +10867,7 @@
           </p:nvPr>
         </p:nvGraphicFramePr>
         <p:xfrm>
-          <a:off x="566928" y="4142232"/>
+          <a:off x="566928" y="3735832"/>
           <a:ext cx="11057839" cy="914400"/>
         </p:xfrm>
         <a:graphic>
@@ -12352,12 +12251,12 @@
         </p:nvSpPr>
         <p:spPr>
           <a:xfrm>
-            <a:off x="566928" y="5532120"/>
-            <a:ext cx="11057839" cy="758952"/>
+            <a:off x="566928" y="3836416"/>
+            <a:ext cx="11057839" cy="1287363"/>
           </a:xfrm>
           <a:prstGeom prst="roundRect">
             <a:avLst>
-              <a:gd name="adj" fmla="val 6024"/>
+              <a:gd name="adj" fmla="val 3551"/>
             </a:avLst>
           </a:prstGeom>
           <a:solidFill>
@@ -12379,8 +12278,8 @@
         </p:nvSpPr>
         <p:spPr>
           <a:xfrm>
-            <a:off x="804672" y="5678424"/>
-            <a:ext cx="2743200" cy="201168"/>
+            <a:off x="804672" y="3946144"/>
+            <a:ext cx="2743200" cy="182880"/>
           </a:xfrm>
           <a:prstGeom prst="rect">
             <a:avLst/>
@@ -12418,8 +12317,8 @@
         </p:nvSpPr>
         <p:spPr>
           <a:xfrm>
-            <a:off x="804672" y="5879592"/>
-            <a:ext cx="10582351" cy="232220"/>
+            <a:off x="804672" y="4129024"/>
+            <a:ext cx="10582351" cy="288595"/>
           </a:xfrm>
           <a:prstGeom prst="rect">
             <a:avLst/>
@@ -12433,12 +12332,12 @@
           <a:p>
             <a:pPr indent="0" marL="0">
               <a:lnSpc>
-                <a:spcPts val="1725"/>
+                <a:spcPts val="2185"/>
               </a:lnSpc>
               <a:buNone/>
             </a:pPr>
             <a:r>
-              <a:rPr lang="en-US" sz="1500" b="1" dirty="0">
+              <a:rPr lang="en-US" sz="1900" b="1" dirty="0">
                 <a:solidFill>
                   <a:srgbClr val="0A1426"/>
                 </a:solidFill>
@@ -12448,7 +12347,7 @@
               </a:rPr>
               <a:t>Even the downside services its debt</a:t>
             </a:r>
-            <a:endParaRPr lang="en-US" sz="1500" dirty="0"/>
+            <a:endParaRPr lang="en-US" sz="1900" dirty="0"/>
           </a:p>
         </p:txBody>
       </p:sp>
@@ -12460,8 +12359,8 @@
         </p:nvSpPr>
         <p:spPr>
           <a:xfrm>
-            <a:off x="804672" y="6184964"/>
-            <a:ext cx="10582351" cy="182880"/>
+            <a:off x="804672" y="4472483"/>
+            <a:ext cx="10582351" cy="578145"/>
           </a:xfrm>
           <a:prstGeom prst="rect">
             <a:avLst/>
@@ -12475,12 +12374,12 @@
           <a:p>
             <a:pPr indent="0" marL="0">
               <a:lnSpc>
-                <a:spcPts val="1207"/>
+                <a:spcPts val="1704"/>
               </a:lnSpc>
               <a:buNone/>
             </a:pPr>
             <a:r>
-              <a:rPr lang="en-US" sz="850" dirty="0">
+              <a:rPr lang="en-US" sz="1200" dirty="0">
                 <a:solidFill>
                   <a:srgbClr val="3B4660"/>
                 </a:solidFill>
@@ -12488,9 +12387,9 @@
                 <a:ea typeface="Calibri" pitchFamily="34" charset="-122"/>
                 <a:cs typeface="Calibri" pitchFamily="34" charset="-120"/>
               </a:rPr>
-              <a:t>At 25% below base — below the floor of the published range — the project still reaches ₹0.55 Cr of stabilised EBITDA. That is the difference between a project with its own assets and one renting somebody else's: the cost base moves with the revenue.</a:t>
-            </a:r>
-            <a:endParaRPr lang="en-US" sz="850" dirty="0"/>
+              <a:t>At 25% below base — under the floor of the published range — the project still reaches ₹0.55 Cr of stabilised EBITDA. A project with its own assets flexes its cost base; one renting somebody else's cannot.</a:t>
+            </a:r>
+            <a:endParaRPr lang="en-US" sz="1200" dirty="0"/>
           </a:p>
         </p:txBody>
       </p:sp>
@@ -12671,8 +12570,8 @@
         </p:nvSpPr>
         <p:spPr>
           <a:xfrm>
-            <a:off x="566928" y="1005840"/>
-            <a:ext cx="11057839" cy="512064"/>
+            <a:off x="566928" y="950976"/>
+            <a:ext cx="11057839" cy="462280"/>
           </a:xfrm>
           <a:prstGeom prst="rect">
             <a:avLst/>
@@ -12686,12 +12585,12 @@
           <a:p>
             <a:pPr indent="0" marL="0">
               <a:lnSpc>
-                <a:spcPts val="1900"/>
+                <a:spcPts val="1750"/>
               </a:lnSpc>
               <a:buNone/>
             </a:pPr>
             <a:r>
-              <a:rPr lang="en-US" sz="1350" dirty="0">
+              <a:rPr lang="en-US" sz="1250" dirty="0">
                 <a:solidFill>
                   <a:srgbClr val="3B4660"/>
                 </a:solidFill>
@@ -12701,7 +12600,7 @@
               </a:rPr>
               <a:t>How Karnal is funded in the existing plan — ₹4 crore of the ₹10 crore round. Shown at project level so it compares like for like against the other two instruments.</a:t>
             </a:r>
-            <a:endParaRPr lang="en-US" sz="1350" dirty="0"/>
+            <a:endParaRPr lang="en-US" sz="1250" dirty="0"/>
           </a:p>
         </p:txBody>
       </p:sp>
@@ -12720,7 +12619,7 @@
           </p:nvPr>
         </p:nvGraphicFramePr>
         <p:xfrm>
-          <a:off x="566928" y="1627632"/>
+          <a:off x="566928" y="1541272"/>
           <a:ext cx="11057839" cy="914400"/>
         </p:xfrm>
         <a:graphic>
@@ -13709,12 +13608,12 @@
         </p:nvSpPr>
         <p:spPr>
           <a:xfrm>
-            <a:off x="566928" y="4370832"/>
-            <a:ext cx="11057839" cy="1870083"/>
+            <a:off x="566928" y="4284472"/>
+            <a:ext cx="11057839" cy="1737492"/>
           </a:xfrm>
           <a:prstGeom prst="roundRect">
             <a:avLst>
-              <a:gd name="adj" fmla="val 2445"/>
+              <a:gd name="adj" fmla="val 2631"/>
             </a:avLst>
           </a:prstGeom>
           <a:solidFill>
@@ -13736,8 +13635,8 @@
         </p:nvSpPr>
         <p:spPr>
           <a:xfrm>
-            <a:off x="804672" y="4517136"/>
-            <a:ext cx="2743200" cy="201168"/>
+            <a:off x="804672" y="4394200"/>
+            <a:ext cx="2743200" cy="182880"/>
           </a:xfrm>
           <a:prstGeom prst="rect">
             <a:avLst/>
@@ -13775,8 +13674,8 @@
         </p:nvSpPr>
         <p:spPr>
           <a:xfrm>
-            <a:off x="804672" y="4718304"/>
-            <a:ext cx="10582351" cy="294145"/>
+            <a:off x="804672" y="4577080"/>
+            <a:ext cx="10582351" cy="288595"/>
           </a:xfrm>
           <a:prstGeom prst="rect">
             <a:avLst/>
@@ -13817,8 +13716,8 @@
         </p:nvSpPr>
         <p:spPr>
           <a:xfrm>
-            <a:off x="804672" y="5085601"/>
-            <a:ext cx="10582351" cy="1082162"/>
+            <a:off x="804672" y="4920539"/>
+            <a:ext cx="10582351" cy="1028273"/>
           </a:xfrm>
           <a:prstGeom prst="rect">
             <a:avLst/>
@@ -13975,7 +13874,7 @@
                 <a:ea typeface="Calibri" pitchFamily="34" charset="-122"/>
                 <a:cs typeface="Calibri" pitchFamily="34" charset="-120"/>
               </a:rPr>
-              <a:t>09</a:t>
+              <a:t>07</a:t>
             </a:r>
             <a:endParaRPr lang="en-US" sz="1300" dirty="0"/>
           </a:p>
@@ -14028,8 +13927,8 @@
         </p:nvSpPr>
         <p:spPr>
           <a:xfrm>
-            <a:off x="566928" y="1005840"/>
-            <a:ext cx="11057839" cy="512064"/>
+            <a:off x="566928" y="950976"/>
+            <a:ext cx="11057839" cy="462280"/>
           </a:xfrm>
           <a:prstGeom prst="rect">
             <a:avLst/>
@@ -14043,12 +13942,12 @@
           <a:p>
             <a:pPr indent="0" marL="0">
               <a:lnSpc>
-                <a:spcPts val="1900"/>
+                <a:spcPts val="1750"/>
               </a:lnSpc>
               <a:buNone/>
             </a:pPr>
             <a:r>
-              <a:rPr lang="en-US" sz="1350" dirty="0">
+              <a:rPr lang="en-US" sz="1250" dirty="0">
                 <a:solidFill>
                   <a:srgbClr val="3B4660"/>
                 </a:solidFill>
@@ -14058,7 +13957,7 @@
               </a:rPr>
               <a:t>A conventional CGTMSE term loan against assets the borrower owns, with a promoter margin and a construction moratorium. Of the three projects, this is the one a credit committee will recognise immediately.</a:t>
             </a:r>
-            <a:endParaRPr lang="en-US" sz="1350" dirty="0"/>
+            <a:endParaRPr lang="en-US" sz="1250" dirty="0"/>
           </a:p>
         </p:txBody>
       </p:sp>
@@ -14069,8 +13968,8 @@
           <p:nvPr/>
         </p:nvGraphicFramePr>
         <p:xfrm>
-          <a:off x="566928" y="1627632"/>
-          <a:ext cx="11057839" cy="2377440"/>
+          <a:off x="566928" y="1541272"/>
+          <a:ext cx="11057839" cy="1874520"/>
         </p:xfrm>
         <a:graphic xmlns:a="http://schemas.openxmlformats.org/drawingml/2006/main">
           <a:graphicData uri="http://schemas.openxmlformats.org/drawingml/2006/chart">
@@ -14086,12 +13985,12 @@
         </p:nvSpPr>
         <p:spPr>
           <a:xfrm>
-            <a:off x="566928" y="4206240"/>
-            <a:ext cx="2599868" cy="1298448"/>
+            <a:off x="566928" y="3616960"/>
+            <a:ext cx="2599868" cy="1152144"/>
           </a:xfrm>
           <a:prstGeom prst="roundRect">
             <a:avLst>
-              <a:gd name="adj" fmla="val 4225"/>
+              <a:gd name="adj" fmla="val 4762"/>
             </a:avLst>
           </a:prstGeom>
           <a:solidFill>
@@ -14113,24 +14012,24 @@
         </p:nvSpPr>
         <p:spPr>
           <a:xfrm>
-            <a:off x="749808" y="4343400"/>
-            <a:ext cx="2234108" cy="219456"/>
-          </a:xfrm>
-          <a:prstGeom prst="rect">
-            <a:avLst/>
-          </a:prstGeom>
-          <a:noFill/>
-          <a:ln/>
-        </p:spPr>
-        <p:txBody>
-          <a:bodyPr wrap="square" lIns="0" tIns="0" rIns="0" bIns="0" rtlCol="0" anchor="ctr"/>
+            <a:off x="749808" y="3735832"/>
+            <a:ext cx="2234108" cy="237744"/>
+          </a:xfrm>
+          <a:prstGeom prst="rect">
+            <a:avLst/>
+          </a:prstGeom>
+          <a:noFill/>
+          <a:ln/>
+        </p:spPr>
+        <p:txBody>
+          <a:bodyPr wrap="square" lIns="0" tIns="0" rIns="0" bIns="0" rtlCol="0" anchor="t"/>
           <a:lstStyle/>
           <a:p>
             <a:pPr indent="0" marL="0">
               <a:buNone/>
             </a:pPr>
             <a:r>
-              <a:rPr lang="en-US" sz="900" b="1" spc="120" kern="0" dirty="0">
+              <a:rPr lang="en-US" sz="850" b="1" spc="100" kern="0" dirty="0">
                 <a:solidFill>
                   <a:srgbClr val="6E7689"/>
                 </a:solidFill>
@@ -14140,7 +14039,7 @@
               </a:rPr>
               <a:t>TOTAL FACILITY</a:t>
             </a:r>
-            <a:endParaRPr lang="en-US" sz="900" dirty="0"/>
+            <a:endParaRPr lang="en-US" sz="850" dirty="0"/>
           </a:p>
         </p:txBody>
       </p:sp>
@@ -14152,7 +14051,7 @@
         </p:nvSpPr>
         <p:spPr>
           <a:xfrm>
-            <a:off x="749808" y="4572000"/>
+            <a:off x="749808" y="3982720"/>
             <a:ext cx="2234108" cy="457200"/>
           </a:xfrm>
           <a:prstGeom prst="rect">
@@ -14162,7 +14061,9 @@
           <a:ln/>
         </p:spPr>
         <p:txBody>
-          <a:bodyPr wrap="square" lIns="0" tIns="0" rIns="0" bIns="0" rtlCol="0" anchor="t"/>
+          <a:bodyPr wrap="square" lIns="0" tIns="0" rIns="0" bIns="0" rtlCol="0" anchor="t">
+            <a:normAutofit/>
+          </a:bodyPr>
           <a:lstStyle/>
           <a:p>
             <a:pPr indent="0" marL="0">
@@ -14191,8 +14092,8 @@
         </p:nvSpPr>
         <p:spPr>
           <a:xfrm>
-            <a:off x="749808" y="5047488"/>
-            <a:ext cx="2234108" cy="384048"/>
+            <a:off x="749808" y="4458208"/>
+            <a:ext cx="2234108" cy="237744"/>
           </a:xfrm>
           <a:prstGeom prst="rect">
             <a:avLst/>
@@ -14233,12 +14134,12 @@
         </p:nvSpPr>
         <p:spPr>
           <a:xfrm>
-            <a:off x="3386252" y="4206240"/>
-            <a:ext cx="2599868" cy="1298448"/>
+            <a:off x="3386252" y="3616960"/>
+            <a:ext cx="2599868" cy="1152144"/>
           </a:xfrm>
           <a:prstGeom prst="roundRect">
             <a:avLst>
-              <a:gd name="adj" fmla="val 4225"/>
+              <a:gd name="adj" fmla="val 4762"/>
             </a:avLst>
           </a:prstGeom>
           <a:solidFill>
@@ -14260,24 +14161,24 @@
         </p:nvSpPr>
         <p:spPr>
           <a:xfrm>
-            <a:off x="3569132" y="4343400"/>
-            <a:ext cx="2234108" cy="219456"/>
-          </a:xfrm>
-          <a:prstGeom prst="rect">
-            <a:avLst/>
-          </a:prstGeom>
-          <a:noFill/>
-          <a:ln/>
-        </p:spPr>
-        <p:txBody>
-          <a:bodyPr wrap="square" lIns="0" tIns="0" rIns="0" bIns="0" rtlCol="0" anchor="ctr"/>
+            <a:off x="3569132" y="3735832"/>
+            <a:ext cx="2234108" cy="237744"/>
+          </a:xfrm>
+          <a:prstGeom prst="rect">
+            <a:avLst/>
+          </a:prstGeom>
+          <a:noFill/>
+          <a:ln/>
+        </p:spPr>
+        <p:txBody>
+          <a:bodyPr wrap="square" lIns="0" tIns="0" rIns="0" bIns="0" rtlCol="0" anchor="t"/>
           <a:lstStyle/>
           <a:p>
             <a:pPr indent="0" marL="0">
               <a:buNone/>
             </a:pPr>
             <a:r>
-              <a:rPr lang="en-US" sz="900" b="1" spc="120" kern="0" dirty="0">
+              <a:rPr lang="en-US" sz="850" b="1" spc="100" kern="0" dirty="0">
                 <a:solidFill>
                   <a:srgbClr val="6E7689"/>
                 </a:solidFill>
@@ -14287,7 +14188,7 @@
               </a:rPr>
               <a:t>ALL-IN RATE</a:t>
             </a:r>
-            <a:endParaRPr lang="en-US" sz="900" dirty="0"/>
+            <a:endParaRPr lang="en-US" sz="850" dirty="0"/>
           </a:p>
         </p:txBody>
       </p:sp>
@@ -14299,7 +14200,7 @@
         </p:nvSpPr>
         <p:spPr>
           <a:xfrm>
-            <a:off x="3569132" y="4572000"/>
+            <a:off x="3569132" y="3982720"/>
             <a:ext cx="2234108" cy="457200"/>
           </a:xfrm>
           <a:prstGeom prst="rect">
@@ -14309,7 +14210,9 @@
           <a:ln/>
         </p:spPr>
         <p:txBody>
-          <a:bodyPr wrap="square" lIns="0" tIns="0" rIns="0" bIns="0" rtlCol="0" anchor="t"/>
+          <a:bodyPr wrap="square" lIns="0" tIns="0" rIns="0" bIns="0" rtlCol="0" anchor="t">
+            <a:normAutofit/>
+          </a:bodyPr>
           <a:lstStyle/>
           <a:p>
             <a:pPr indent="0" marL="0">
@@ -14338,8 +14241,8 @@
         </p:nvSpPr>
         <p:spPr>
           <a:xfrm>
-            <a:off x="3569132" y="5047488"/>
-            <a:ext cx="2234108" cy="384048"/>
+            <a:off x="3569132" y="4458208"/>
+            <a:ext cx="2234108" cy="237744"/>
           </a:xfrm>
           <a:prstGeom prst="rect">
             <a:avLst/>
@@ -14380,12 +14283,12 @@
         </p:nvSpPr>
         <p:spPr>
           <a:xfrm>
-            <a:off x="6205576" y="4206240"/>
-            <a:ext cx="2599868" cy="1298448"/>
+            <a:off x="6205576" y="3616960"/>
+            <a:ext cx="2599868" cy="1152144"/>
           </a:xfrm>
           <a:prstGeom prst="roundRect">
             <a:avLst>
-              <a:gd name="adj" fmla="val 4225"/>
+              <a:gd name="adj" fmla="val 4762"/>
             </a:avLst>
           </a:prstGeom>
           <a:solidFill>
@@ -14407,24 +14310,24 @@
         </p:nvSpPr>
         <p:spPr>
           <a:xfrm>
-            <a:off x="6388456" y="4343400"/>
-            <a:ext cx="2234108" cy="219456"/>
-          </a:xfrm>
-          <a:prstGeom prst="rect">
-            <a:avLst/>
-          </a:prstGeom>
-          <a:noFill/>
-          <a:ln/>
-        </p:spPr>
-        <p:txBody>
-          <a:bodyPr wrap="square" lIns="0" tIns="0" rIns="0" bIns="0" rtlCol="0" anchor="ctr"/>
+            <a:off x="6388456" y="3735832"/>
+            <a:ext cx="2234108" cy="237744"/>
+          </a:xfrm>
+          <a:prstGeom prst="rect">
+            <a:avLst/>
+          </a:prstGeom>
+          <a:noFill/>
+          <a:ln/>
+        </p:spPr>
+        <p:txBody>
+          <a:bodyPr wrap="square" lIns="0" tIns="0" rIns="0" bIns="0" rtlCol="0" anchor="t"/>
           <a:lstStyle/>
           <a:p>
             <a:pPr indent="0" marL="0">
               <a:buNone/>
             </a:pPr>
             <a:r>
-              <a:rPr lang="en-US" sz="900" b="1" spc="120" kern="0" dirty="0">
+              <a:rPr lang="en-US" sz="850" b="1" spc="100" kern="0" dirty="0">
                 <a:solidFill>
                   <a:srgbClr val="6E7689"/>
                 </a:solidFill>
@@ -14434,7 +14337,7 @@
               </a:rPr>
               <a:t>MINIMUM DSCR</a:t>
             </a:r>
-            <a:endParaRPr lang="en-US" sz="900" dirty="0"/>
+            <a:endParaRPr lang="en-US" sz="850" dirty="0"/>
           </a:p>
         </p:txBody>
       </p:sp>
@@ -14446,7 +14349,7 @@
         </p:nvSpPr>
         <p:spPr>
           <a:xfrm>
-            <a:off x="6388456" y="4572000"/>
+            <a:off x="6388456" y="3982720"/>
             <a:ext cx="2234108" cy="457200"/>
           </a:xfrm>
           <a:prstGeom prst="rect">
@@ -14456,7 +14359,9 @@
           <a:ln/>
         </p:spPr>
         <p:txBody>
-          <a:bodyPr wrap="square" lIns="0" tIns="0" rIns="0" bIns="0" rtlCol="0" anchor="t"/>
+          <a:bodyPr wrap="square" lIns="0" tIns="0" rIns="0" bIns="0" rtlCol="0" anchor="t">
+            <a:normAutofit/>
+          </a:bodyPr>
           <a:lstStyle/>
           <a:p>
             <a:pPr indent="0" marL="0">
@@ -14485,8 +14390,8 @@
         </p:nvSpPr>
         <p:spPr>
           <a:xfrm>
-            <a:off x="6388456" y="5047488"/>
-            <a:ext cx="2234108" cy="384048"/>
+            <a:off x="6388456" y="4458208"/>
+            <a:ext cx="2234108" cy="237744"/>
           </a:xfrm>
           <a:prstGeom prst="rect">
             <a:avLst/>
@@ -14527,12 +14432,12 @@
         </p:nvSpPr>
         <p:spPr>
           <a:xfrm>
-            <a:off x="9024899" y="4206240"/>
-            <a:ext cx="2599868" cy="1298448"/>
+            <a:off x="9024899" y="3616960"/>
+            <a:ext cx="2599868" cy="1152144"/>
           </a:xfrm>
           <a:prstGeom prst="roundRect">
             <a:avLst>
-              <a:gd name="adj" fmla="val 4225"/>
+              <a:gd name="adj" fmla="val 4762"/>
             </a:avLst>
           </a:prstGeom>
           <a:solidFill>
@@ -14554,24 +14459,24 @@
         </p:nvSpPr>
         <p:spPr>
           <a:xfrm>
-            <a:off x="9207779" y="4343400"/>
-            <a:ext cx="2234108" cy="219456"/>
-          </a:xfrm>
-          <a:prstGeom prst="rect">
-            <a:avLst/>
-          </a:prstGeom>
-          <a:noFill/>
-          <a:ln/>
-        </p:spPr>
-        <p:txBody>
-          <a:bodyPr wrap="square" lIns="0" tIns="0" rIns="0" bIns="0" rtlCol="0" anchor="ctr"/>
+            <a:off x="9207779" y="3735832"/>
+            <a:ext cx="2234108" cy="237744"/>
+          </a:xfrm>
+          <a:prstGeom prst="rect">
+            <a:avLst/>
+          </a:prstGeom>
+          <a:noFill/>
+          <a:ln/>
+        </p:spPr>
+        <p:txBody>
+          <a:bodyPr wrap="square" lIns="0" tIns="0" rIns="0" bIns="0" rtlCol="0" anchor="t"/>
           <a:lstStyle/>
           <a:p>
             <a:pPr indent="0" marL="0">
               <a:buNone/>
             </a:pPr>
             <a:r>
-              <a:rPr lang="en-US" sz="900" b="1" spc="120" kern="0" dirty="0">
+              <a:rPr lang="en-US" sz="850" b="1" spc="100" kern="0" dirty="0">
                 <a:solidFill>
                   <a:srgbClr val="6E7689"/>
                 </a:solidFill>
@@ -14581,7 +14486,7 @@
               </a:rPr>
               <a:t>DEBT CAPACITY</a:t>
             </a:r>
-            <a:endParaRPr lang="en-US" sz="900" dirty="0"/>
+            <a:endParaRPr lang="en-US" sz="850" dirty="0"/>
           </a:p>
         </p:txBody>
       </p:sp>
@@ -14593,7 +14498,7 @@
         </p:nvSpPr>
         <p:spPr>
           <a:xfrm>
-            <a:off x="9207779" y="4572000"/>
+            <a:off x="9207779" y="3982720"/>
             <a:ext cx="2234108" cy="457200"/>
           </a:xfrm>
           <a:prstGeom prst="rect">
@@ -14603,7 +14508,9 @@
           <a:ln/>
         </p:spPr>
         <p:txBody>
-          <a:bodyPr wrap="square" lIns="0" tIns="0" rIns="0" bIns="0" rtlCol="0" anchor="t"/>
+          <a:bodyPr wrap="square" lIns="0" tIns="0" rIns="0" bIns="0" rtlCol="0" anchor="t">
+            <a:normAutofit/>
+          </a:bodyPr>
           <a:lstStyle/>
           <a:p>
             <a:pPr indent="0" marL="0">
@@ -14632,8 +14539,8 @@
         </p:nvSpPr>
         <p:spPr>
           <a:xfrm>
-            <a:off x="9207779" y="5047488"/>
-            <a:ext cx="2234108" cy="384048"/>
+            <a:off x="9207779" y="4458208"/>
+            <a:ext cx="2234108" cy="237744"/>
           </a:xfrm>
           <a:prstGeom prst="rect">
             <a:avLst/>
@@ -14674,12 +14581,12 @@
         </p:nvSpPr>
         <p:spPr>
           <a:xfrm>
-            <a:off x="566928" y="5760720"/>
-            <a:ext cx="11057839" cy="731520"/>
+            <a:off x="566928" y="5061712"/>
+            <a:ext cx="11057839" cy="1287363"/>
           </a:xfrm>
           <a:prstGeom prst="roundRect">
             <a:avLst>
-              <a:gd name="adj" fmla="val 6250"/>
+              <a:gd name="adj" fmla="val 3551"/>
             </a:avLst>
           </a:prstGeom>
           <a:solidFill>
@@ -14701,8 +14608,8 @@
         </p:nvSpPr>
         <p:spPr>
           <a:xfrm>
-            <a:off x="804672" y="5907024"/>
-            <a:ext cx="2743200" cy="201168"/>
+            <a:off x="804672" y="5171440"/>
+            <a:ext cx="2743200" cy="182880"/>
           </a:xfrm>
           <a:prstGeom prst="rect">
             <a:avLst/>
@@ -14740,8 +14647,8 @@
         </p:nvSpPr>
         <p:spPr>
           <a:xfrm>
-            <a:off x="804672" y="6108192"/>
-            <a:ext cx="10582351" cy="232220"/>
+            <a:off x="804672" y="5354320"/>
+            <a:ext cx="10582351" cy="288595"/>
           </a:xfrm>
           <a:prstGeom prst="rect">
             <a:avLst/>
@@ -14755,12 +14662,12 @@
           <a:p>
             <a:pPr indent="0" marL="0">
               <a:lnSpc>
-                <a:spcPts val="1725"/>
+                <a:spcPts val="2185"/>
               </a:lnSpc>
               <a:buNone/>
             </a:pPr>
             <a:r>
-              <a:rPr lang="en-US" sz="1500" b="1" dirty="0">
+              <a:rPr lang="en-US" sz="1900" b="1" dirty="0">
                 <a:solidFill>
                   <a:srgbClr val="0A1426"/>
                 </a:solidFill>
@@ -14770,7 +14677,7 @@
               </a:rPr>
               <a:t>The cleanest credit in the pack</a:t>
             </a:r>
-            <a:endParaRPr lang="en-US" sz="1500" dirty="0"/>
+            <a:endParaRPr lang="en-US" sz="1900" dirty="0"/>
           </a:p>
         </p:txBody>
       </p:sp>
@@ -14782,8 +14689,8 @@
         </p:nvSpPr>
         <p:spPr>
           <a:xfrm>
-            <a:off x="804672" y="6413563"/>
-            <a:ext cx="10582351" cy="182880"/>
+            <a:off x="804672" y="5697779"/>
+            <a:ext cx="10582351" cy="578145"/>
           </a:xfrm>
           <a:prstGeom prst="rect">
             <a:avLst/>
@@ -14797,12 +14704,12 @@
           <a:p>
             <a:pPr indent="0" marL="0">
               <a:lnSpc>
-                <a:spcPts val="1207"/>
+                <a:spcPts val="1704"/>
               </a:lnSpc>
               <a:buNone/>
             </a:pPr>
             <a:r>
-              <a:rPr lang="en-US" sz="850" dirty="0">
+              <a:rPr lang="en-US" sz="1200" dirty="0">
                 <a:solidFill>
                   <a:srgbClr val="3B4660"/>
                 </a:solidFill>
@@ -14810,9 +14717,9 @@
                 <a:ea typeface="Calibri" pitchFamily="34" charset="-122"/>
                 <a:cs typeface="Calibri" pitchFamily="34" charset="-120"/>
               </a:rPr>
-              <a:t>A signed fifteen-year sub-lease, a rent-free construction period, assets the bank can hypothecate, a 2-year moratorium covering construction and ramp, and DSCR at 1.48× rising through the term. Take this facility to a bank first — a sanction here establishes the CGTMSE track record the two concession facilities will need.</a:t>
-            </a:r>
-            <a:endParaRPr lang="en-US" sz="850" dirty="0"/>
+              <a:t>A signed fifteen-year sub-lease, assets the bank can hypothecate, a 2-year moratorium covering construction and ramp, and DSCR at 1.48×. Bank this one first — the sanction establishes the CGTMSE record the two concession facilities will need.</a:t>
+            </a:r>
+            <a:endParaRPr lang="en-US" sz="1200" dirty="0"/>
           </a:p>
         </p:txBody>
       </p:sp>
@@ -14993,8 +14900,8 @@
         </p:nvSpPr>
         <p:spPr>
           <a:xfrm>
-            <a:off x="566928" y="1005840"/>
-            <a:ext cx="11057839" cy="512064"/>
+            <a:off x="566928" y="950976"/>
+            <a:ext cx="11057839" cy="462280"/>
           </a:xfrm>
           <a:prstGeom prst="rect">
             <a:avLst/>
@@ -15008,12 +14915,12 @@
           <a:p>
             <a:pPr indent="0" marL="0">
               <a:lnSpc>
-                <a:spcPts val="1900"/>
+                <a:spcPts val="1750"/>
               </a:lnSpc>
               <a:buNone/>
             </a:pPr>
             <a:r>
-              <a:rPr lang="en-US" sz="1350" dirty="0">
+              <a:rPr lang="en-US" sz="1250" dirty="0">
                 <a:solidFill>
                   <a:srgbClr val="3B4660"/>
                 </a:solidFill>
@@ -15023,7 +14930,7 @@
               </a:rPr>
               <a:t>Debt with a fixed conversion date. The instrument that most closely matches a build-and-ramp project: no dilution while the site is under construction, conversion once it is trading.</a:t>
             </a:r>
-            <a:endParaRPr lang="en-US" sz="1350" dirty="0"/>
+            <a:endParaRPr lang="en-US" sz="1250" dirty="0"/>
           </a:p>
         </p:txBody>
       </p:sp>
@@ -15042,7 +14949,7 @@
           </p:nvPr>
         </p:nvGraphicFramePr>
         <p:xfrm>
-          <a:off x="566928" y="1627632"/>
+          <a:off x="566928" y="1541272"/>
           <a:ext cx="11057839" cy="914400"/>
         </p:xfrm>
         <a:graphic>
@@ -15893,12 +15800,12 @@
         </p:nvSpPr>
         <p:spPr>
           <a:xfrm>
-            <a:off x="566928" y="4023360"/>
-            <a:ext cx="11057839" cy="1640690"/>
+            <a:off x="566928" y="3863848"/>
+            <a:ext cx="11057839" cy="1962556"/>
           </a:xfrm>
           <a:prstGeom prst="roundRect">
             <a:avLst>
-              <a:gd name="adj" fmla="val 2787"/>
+              <a:gd name="adj" fmla="val 2330"/>
             </a:avLst>
           </a:prstGeom>
           <a:solidFill>
@@ -15920,8 +15827,8 @@
         </p:nvSpPr>
         <p:spPr>
           <a:xfrm>
-            <a:off x="804672" y="4169664"/>
-            <a:ext cx="2743200" cy="201168"/>
+            <a:off x="804672" y="3973576"/>
+            <a:ext cx="2743200" cy="182880"/>
           </a:xfrm>
           <a:prstGeom prst="rect">
             <a:avLst/>
@@ -15959,8 +15866,8 @@
         </p:nvSpPr>
         <p:spPr>
           <a:xfrm>
-            <a:off x="804672" y="4370832"/>
-            <a:ext cx="10582351" cy="294145"/>
+            <a:off x="804672" y="4156456"/>
+            <a:ext cx="10582351" cy="288595"/>
           </a:xfrm>
           <a:prstGeom prst="rect">
             <a:avLst/>
@@ -16001,8 +15908,8 @@
         </p:nvSpPr>
         <p:spPr>
           <a:xfrm>
-            <a:off x="804672" y="4738129"/>
-            <a:ext cx="10582351" cy="852769"/>
+            <a:off x="804672" y="4499915"/>
+            <a:ext cx="10582351" cy="1253338"/>
           </a:xfrm>
           <a:prstGeom prst="rect">
             <a:avLst/>
@@ -16029,149 +15936,28 @@
                 <a:ea typeface="Calibri" pitchFamily="34" charset="-122"/>
                 <a:cs typeface="Calibri" pitchFamily="34" charset="-120"/>
               </a:rPr>
-              <a:t>Years 1 to 3 are construction and ramp: the project loses ₹0.38 Cr at EBITDA in year 1, and there is no rent-free relief on a debenture coupon. ₹1.18 Cr has to be funded from the group while the site is being built. A CGTMSE term loan with a two-year principal moratorium defers the same burden and costs less.</a:t>
+              <a:t>Years 1 to 3 are construction and ramp — the project loses ₹0.38 Cr at EBITDA in year 1, and there is no rent-free relief on a debenture coupon. ₹1.18 Cr has to come from the group while the site is being built. A CGTMSE term loan with a two-year moratorium defers the same burden for less.</a:t>
             </a:r>
             <a:endParaRPr lang="en-US" sz="1200" dirty="0"/>
           </a:p>
-        </p:txBody>
-      </p:sp>
-      <p:sp>
-        <p:nvSpPr>
-          <p:cNvPr id="11" name="Shape 8"/>
-          <p:cNvSpPr/>
-          <p:nvPr/>
-        </p:nvSpPr>
-        <p:spPr>
-          <a:xfrm>
-            <a:off x="566928" y="5865218"/>
-            <a:ext cx="11057839" cy="731520"/>
-          </a:xfrm>
-          <a:prstGeom prst="roundRect">
-            <a:avLst>
-              <a:gd name="adj" fmla="val 6250"/>
-            </a:avLst>
-          </a:prstGeom>
-          <a:solidFill>
-            <a:srgbClr val="F1F5FE"/>
-          </a:solidFill>
-          <a:ln w="15875">
-            <a:solidFill>
-              <a:srgbClr val="2B66EA"/>
-            </a:solidFill>
-            <a:prstDash val="solid"/>
-          </a:ln>
-        </p:spPr>
-      </p:sp>
-      <p:sp>
-        <p:nvSpPr>
-          <p:cNvPr id="12" name="Text 9"/>
-          <p:cNvSpPr/>
-          <p:nvPr/>
-        </p:nvSpPr>
-        <p:spPr>
-          <a:xfrm>
-            <a:off x="804672" y="6011522"/>
-            <a:ext cx="2743200" cy="201168"/>
-          </a:xfrm>
-          <a:prstGeom prst="rect">
-            <a:avLst/>
-          </a:prstGeom>
-          <a:noFill/>
-          <a:ln/>
-        </p:spPr>
-        <p:txBody>
-          <a:bodyPr wrap="square" lIns="0" tIns="0" rIns="0" bIns="0" rtlCol="0" anchor="ctr"/>
-          <a:lstStyle/>
-          <a:p>
-            <a:pPr indent="0" marL="0">
-              <a:buNone/>
-            </a:pPr>
-            <a:r>
-              <a:rPr lang="en-US" sz="850" b="1" spc="160" kern="0" dirty="0">
-                <a:solidFill>
-                  <a:srgbClr val="2A51A3"/>
-                </a:solidFill>
-                <a:latin typeface="Calibri" pitchFamily="34" charset="0"/>
-                <a:ea typeface="Calibri" pitchFamily="34" charset="-122"/>
-                <a:cs typeface="Calibri" pitchFamily="34" charset="-120"/>
-              </a:rPr>
-              <a:t>NOTE</a:t>
-            </a:r>
-            <a:endParaRPr lang="en-US" sz="850" dirty="0"/>
-          </a:p>
-        </p:txBody>
-      </p:sp>
-      <p:sp>
-        <p:nvSpPr>
-          <p:cNvPr id="13" name="Text 10"/>
-          <p:cNvSpPr/>
-          <p:nvPr/>
-        </p:nvSpPr>
-        <p:spPr>
-          <a:xfrm>
-            <a:off x="804672" y="6212690"/>
-            <a:ext cx="10582351" cy="232220"/>
-          </a:xfrm>
-          <a:prstGeom prst="rect">
-            <a:avLst/>
-          </a:prstGeom>
-          <a:noFill/>
-          <a:ln/>
-        </p:spPr>
-        <p:txBody>
-          <a:bodyPr wrap="square" lIns="0" tIns="0" rIns="0" bIns="0" rtlCol="0" anchor="t"/>
-          <a:lstStyle/>
           <a:p>
             <a:pPr indent="0" marL="0">
               <a:lnSpc>
-                <a:spcPts val="1725"/>
+                <a:spcPts val="1704"/>
               </a:lnSpc>
               <a:buNone/>
             </a:pPr>
-            <a:r>
-              <a:rPr lang="en-US" sz="1500" b="1" dirty="0">
-                <a:solidFill>
-                  <a:srgbClr val="0A1426"/>
-                </a:solidFill>
-                <a:latin typeface="Calibri" pitchFamily="34" charset="0"/>
-                <a:ea typeface="Calibri" pitchFamily="34" charset="-122"/>
-                <a:cs typeface="Calibri" pitchFamily="34" charset="-120"/>
-              </a:rPr>
-              <a:t>A structural variant worth considering instead</a:t>
-            </a:r>
-            <a:endParaRPr lang="en-US" sz="1500" dirty="0"/>
-          </a:p>
-        </p:txBody>
-      </p:sp>
-      <p:sp>
-        <p:nvSpPr>
-          <p:cNvPr id="14" name="Text 11"/>
-          <p:cNvSpPr/>
-          <p:nvPr/>
-        </p:nvSpPr>
-        <p:spPr>
-          <a:xfrm>
-            <a:off x="804672" y="6518062"/>
-            <a:ext cx="10582351" cy="182880"/>
-          </a:xfrm>
-          <a:prstGeom prst="rect">
-            <a:avLst/>
-          </a:prstGeom>
-          <a:noFill/>
-          <a:ln/>
-        </p:spPr>
-        <p:txBody>
-          <a:bodyPr wrap="square" lIns="0" tIns="0" rIns="0" bIns="0" rtlCol="0" anchor="t"/>
-          <a:lstStyle/>
+            <a:endParaRPr lang="en-US" sz="1200" dirty="0"/>
+          </a:p>
           <a:p>
             <a:pPr indent="0" marL="0">
               <a:lnSpc>
-                <a:spcPts val="1207"/>
+                <a:spcPts val="1704"/>
               </a:lnSpc>
               <a:buNone/>
             </a:pPr>
             <a:r>
-              <a:rPr lang="en-US" sz="850" dirty="0">
+              <a:rPr lang="en-US" sz="1200" dirty="0">
                 <a:solidFill>
                   <a:srgbClr val="3B4660"/>
                 </a:solidFill>
@@ -16179,15 +15965,15 @@
                 <a:ea typeface="Calibri" pitchFamily="34" charset="-122"/>
                 <a:cs typeface="Calibri" pitchFamily="34" charset="-120"/>
               </a:rPr>
-              <a:t>If the objective is deferred dilution rather than debt capacity, a zero-coupon CCD with a conversion premium removes the cash burden entirely — the investor's return comes from converting at a fixed discount to a later round rather than from a coupon during construction. The pricing must still be fixed on the date of issue to satisfy the FEMA conversion-formula test if any of the money is foreign.</a:t>
-            </a:r>
-            <a:endParaRPr lang="en-US" sz="850" dirty="0"/>
-          </a:p>
-        </p:txBody>
-      </p:sp>
-      <p:sp>
-        <p:nvSpPr>
-          <p:cNvPr id="15" name="Text 12"/>
+              <a:t>If the objective is deferred dilution rather than debt capacity, a zero-coupon CCD with a conversion premium removes the cash burden — priced on the date of issue, to satisfy the FEMA formula test.</a:t>
+            </a:r>
+            <a:endParaRPr lang="en-US" sz="1200" dirty="0"/>
+          </a:p>
+        </p:txBody>
+      </p:sp>
+      <p:sp>
+        <p:nvSpPr>
+          <p:cNvPr id="11" name="Text 8"/>
           <p:cNvSpPr/>
           <p:nvPr/>
         </p:nvSpPr>

--- a/pptx/EOD-Karnal-Project-Finance.pptx
+++ b/pptx/EOD-Karnal-Project-Finance.pptx
@@ -4544,7 +4544,7 @@
                 <a:ea typeface="Calibri" pitchFamily="34" charset="-122"/>
                 <a:cs typeface="Calibri" pitchFamily="34" charset="-120"/>
               </a:rPr>
-              <a:t>6.0%</a:t>
+              <a:t>8.2%</a:t>
             </a:r>
             <a:endParaRPr lang="en-US" sz="3000" dirty="0"/>
           </a:p>
@@ -4877,7 +4877,7 @@
                 <a:ea typeface="Calibri" pitchFamily="34" charset="-122"/>
                 <a:cs typeface="Calibri" pitchFamily="34" charset="-120"/>
               </a:rPr>
-              <a:t>1.39×</a:t>
+              <a:t>1.52×</a:t>
             </a:r>
             <a:endParaRPr lang="en-US" sz="950" dirty="0"/>
           </a:p>
@@ -4975,7 +4975,7 @@
                 <a:ea typeface="Calibri" pitchFamily="34" charset="-122"/>
                 <a:cs typeface="Calibri" pitchFamily="34" charset="-120"/>
               </a:rPr>
-              <a:t>100%</a:t>
+              <a:t>84%</a:t>
             </a:r>
             <a:endParaRPr lang="en-US" sz="950" dirty="0"/>
           </a:p>
@@ -5694,7 +5694,7 @@
                 <a:ea typeface="Calibri" pitchFamily="34" charset="-122"/>
                 <a:cs typeface="Calibri" pitchFamily="34" charset="-120"/>
               </a:rPr>
-              <a:t>1.0%</a:t>
+              <a:t>7.5%</a:t>
             </a:r>
             <a:endParaRPr lang="en-US" sz="3000" dirty="0"/>
           </a:p>
@@ -6125,7 +6125,7 @@
                 <a:ea typeface="Calibri" pitchFamily="34" charset="-122"/>
                 <a:cs typeface="Calibri" pitchFamily="34" charset="-120"/>
               </a:rPr>
-              <a:t>1.05×</a:t>
+              <a:t>1.42×</a:t>
             </a:r>
             <a:endParaRPr lang="en-US" sz="950" dirty="0"/>
           </a:p>
@@ -13130,7 +13130,7 @@
                           <a:ea typeface="Calibri" pitchFamily="34" charset="-122"/>
                           <a:cs typeface="Calibri" pitchFamily="34" charset="-120"/>
                         </a:rPr>
-                        <a:t>₹2.02 Cr</a:t>
+                        <a:t>₹2.61 Cr</a:t>
                       </a:r>
                       <a:endParaRPr lang="en-US" sz="1100" dirty="0">
                         <a:latin typeface="Calibri" charset="0"/>
@@ -13406,7 +13406,7 @@
                           <a:ea typeface="Calibri" pitchFamily="34" charset="-122"/>
                           <a:cs typeface="Calibri" pitchFamily="34" charset="-120"/>
                         </a:rPr>
-                        <a:t>6.0%</a:t>
+                        <a:t>8.2%</a:t>
                       </a:r>
                       <a:endParaRPr lang="en-US" sz="1100" dirty="0">
                         <a:latin typeface="Calibri" charset="0"/>
@@ -13544,7 +13544,7 @@
                           <a:ea typeface="Calibri" pitchFamily="34" charset="-122"/>
                           <a:cs typeface="Calibri" pitchFamily="34" charset="-120"/>
                         </a:rPr>
-                        <a:t>100%</a:t>
+                        <a:t>84%</a:t>
                       </a:r>
                       <a:endParaRPr lang="en-US" sz="1100" dirty="0">
                         <a:latin typeface="Calibri" charset="0"/>
@@ -13744,7 +13744,7 @@
                 <a:ea typeface="Calibri" pitchFamily="34" charset="-122"/>
                 <a:cs typeface="Calibri" pitchFamily="34" charset="-120"/>
               </a:rPr>
-              <a:t>At 45% the investor earns 6.0% — the best of the three project-level equity cases in this pack, and still well short of 22%. The reason is structural: a single park generating ₹2–2.6 crore of mature EBITDA cannot carry both a venture return on ₹4 crore and an operator's margin. Equity works at portfolio level, where one round backs five parks and a brand. It does not work one park at a time — which is an argument about where the equity sits, not whether to raise it.</a:t>
+              <a:t>At 45% the investor earns 8.2% — the best of the three project-level equity cases in this pack, and still well short of 22%. The reason is structural: a single park generating ₹2–2.6 crore of mature EBITDA cannot carry both a venture return on ₹4 crore and an operator's margin. Equity works at portfolio level, where one round backs five parks and a brand. It does not work one park at a time — which is an argument about where the equity sits, not whether to raise it.</a:t>
             </a:r>
             <a:endParaRPr lang="en-US" sz="1200" dirty="0"/>
           </a:p>
@@ -15736,7 +15736,7 @@
                           <a:ea typeface="Calibri" pitchFamily="34" charset="-122"/>
                           <a:cs typeface="Calibri" pitchFamily="34" charset="-120"/>
                         </a:rPr>
-                        <a:t>1.0%</a:t>
+                        <a:t>7.5%</a:t>
                       </a:r>
                       <a:endParaRPr lang="en-US" sz="1100" dirty="0">
                         <a:latin typeface="Calibri" charset="0"/>

--- a/pptx/EOD-Karnal-Project-Finance.pptx
+++ b/pptx/EOD-Karnal-Project-Finance.pptx
@@ -117,298 +117,7 @@
 </p:presentation>
 </file>
 
-<file path=ppt/charts/chart12.xml><?xml version="1.0" encoding="utf-8"?>
-<c:chartSpace xmlns:c="http://schemas.openxmlformats.org/drawingml/2006/chart" xmlns:a="http://schemas.openxmlformats.org/drawingml/2006/main" xmlns:r="http://schemas.openxmlformats.org/officeDocument/2006/relationships">
-  <c:date1904 val="0"/>
-  <c:roundedCorners val="1"/>
-  <c:chart>
-    <c:autoTitleDeleted val="1"/>
-    <c:plotArea>
-      <c:layout/>
-      <c:barChart>
-        <c:barDir val="bar"/>
-        <c:grouping val="clustered"/>
-        <c:varyColors val="0"/>
-        <c:ser>
-          <c:idx val="0"/>
-          <c:order val="0"/>
-          <c:tx>
-            <c:strRef>
-              <c:f>Sheet1!$B$1</c:f>
-              <c:strCache>
-                <c:ptCount val="1"/>
-                <c:pt idx="0">
-                  <c:v>Capex</c:v>
-                </c:pt>
-              </c:strCache>
-            </c:strRef>
-          </c:tx>
-          <c:spPr>
-            <a:solidFill>
-              <a:srgbClr val="2B66EA"/>
-            </a:solidFill>
-            <a:effectLst/>
-          </c:spPr>
-          <c:invertIfNegative val="0"/>
-          <c:dLbls>
-            <c:numFmt formatCode="0.00" sourceLinked="0"/>
-            <c:txPr>
-              <a:bodyPr/>
-              <a:lstStyle/>
-              <a:p>
-                <a:pPr>
-                  <a:defRPr b="0" i="0" strike="noStrike" sz="900" u="none">
-                    <a:solidFill>
-                      <a:srgbClr val="3B4660"/>
-                    </a:solidFill>
-                    <a:latin typeface="Calibri"/>
-                  </a:defRPr>
-                </a:pPr>
-              </a:p>
-            </c:txPr>
-            <c:showLegendKey val="0"/>
-            <c:showVal val="1"/>
-            <c:showCatName val="0"/>
-            <c:showSerName val="0"/>
-            <c:showPercent val="0"/>
-            <c:showBubbleSize val="0"/>
-            <c:showLeaderLines val="0"/>
-          </c:dLbls>
-          <c:cat>
-            <c:multiLvlStrRef>
-              <c:f>Sheet1!$A$2:$A$7</c:f>
-              <c:multiLvlStrCache>
-                <c:ptCount val="6"/>
-                <c:lvl>
-                  <c:pt idx="0">
-                    <c:v>Civil</c:v>
-                  </c:pt>
-                  <c:pt idx="1">
-                    <c:v>Activity equipment</c:v>
-                  </c:pt>
-                  <c:pt idx="2">
-                    <c:v>F&amp;B outlet fit-out and kitchen</c:v>
-                  </c:pt>
-                  <c:pt idx="3">
-                    <c:v>Ticketing</c:v>
-                  </c:pt>
-                  <c:pt idx="4">
-                    <c:v>Highway signage</c:v>
-                  </c:pt>
-                  <c:pt idx="5">
-                    <c:v>Pre-operative</c:v>
-                  </c:pt>
-                </c:lvl>
-              </c:multiLvlStrCache>
-            </c:multiLvlStrRef>
-          </c:cat>
-          <c:val>
-            <c:numRef>
-              <c:f>Sheet1!$B$2:$B$7</c:f>
-              <c:numCache>
-                <c:formatCode>General</c:formatCode>
-                <c:ptCount val="6"/>
-                <c:pt idx="0">
-                  <c:v>1.3</c:v>
-                </c:pt>
-                <c:pt idx="1">
-                  <c:v>1.9</c:v>
-                </c:pt>
-                <c:pt idx="2">
-                  <c:v>0.35</c:v>
-                </c:pt>
-                <c:pt idx="3">
-                  <c:v>0.15</c:v>
-                </c:pt>
-                <c:pt idx="4">
-                  <c:v>0.12</c:v>
-                </c:pt>
-                <c:pt idx="5">
-                  <c:v>0.18</c:v>
-                </c:pt>
-              </c:numCache>
-            </c:numRef>
-          </c:val>
-        </c:ser>
-        <c:dLbls>
-          <c:numFmt formatCode="0.00" sourceLinked="0"/>
-          <c:txPr>
-            <a:bodyPr/>
-            <a:lstStyle/>
-            <a:p>
-              <a:pPr>
-                <a:defRPr b="0" i="0" strike="noStrike" sz="900" u="none">
-                  <a:solidFill>
-                    <a:srgbClr val="3B4660"/>
-                  </a:solidFill>
-                  <a:latin typeface="Calibri"/>
-                </a:defRPr>
-              </a:pPr>
-            </a:p>
-          </c:txPr>
-          <c:showLegendKey val="0"/>
-          <c:showVal val="1"/>
-          <c:showCatName val="0"/>
-          <c:showSerName val="0"/>
-          <c:showPercent val="0"/>
-          <c:showBubbleSize val="0"/>
-          <c:showLeaderLines val="0"/>
-        </c:dLbls>
-        <c:gapWidth val="45"/>
-        <c:overlap val="0"/>
-        <c:axId val="2094734554"/>
-        <c:axId val="2094734552"/>
-        <c:axId val="2094734556"/>
-      </c:barChart>
-      <c:catAx>
-        <c:axId val="2094734554"/>
-        <c:scaling>
-          <c:orientation val="minMax"/>
-        </c:scaling>
-        <c:delete val="0"/>
-        <c:axPos val="l"/>
-        <c:numFmt formatCode="General" sourceLinked="1"/>
-        <c:majorTickMark val="out"/>
-        <c:minorTickMark val="none"/>
-        <c:tickLblPos val="nextTo"/>
-        <c:spPr>
-          <a:ln w="12700" cap="flat">
-            <a:solidFill>
-              <a:srgbClr val="888888"/>
-            </a:solidFill>
-            <a:prstDash val="solid"/>
-            <a:round/>
-          </a:ln>
-        </c:spPr>
-        <c:txPr>
-          <a:bodyPr/>
-          <a:lstStyle/>
-          <a:p>
-            <a:pPr>
-              <a:defRPr sz="900" b="0" i="0" u="none" strike="noStrike">
-                <a:solidFill>
-                  <a:srgbClr val="3B4660"/>
-                </a:solidFill>
-                <a:latin typeface="Calibri"/>
-              </a:defRPr>
-            </a:pPr>
-            <a:endParaRPr lang="en-US"/>
-          </a:p>
-        </c:txPr>
-        <c:crossAx val="2094734552"/>
-        <c:crosses val="autoZero"/>
-        <c:auto val="1"/>
-        <c:lblAlgn val="ctr"/>
-        <c:noMultiLvlLbl val="1"/>
-      </c:catAx>
-      <c:valAx>
-        <c:axId val="2094734552"/>
-        <c:scaling>
-          <c:orientation val="minMax"/>
-        </c:scaling>
-        <c:delete val="0"/>
-        <c:axPos val="b"/>
-        <c:majorGridlines>
-          <c:spPr>
-            <a:ln w="12700" cap="flat">
-              <a:solidFill>
-                <a:srgbClr val="E2E4EA"/>
-              </a:solidFill>
-              <a:prstDash val="solid"/>
-              <a:round/>
-            </a:ln>
-          </c:spPr>
-        </c:majorGridlines>
-        <c:title>
-          <c:tx>
-            <c:rich>
-              <a:bodyPr/>
-              <a:lstStyle/>
-              <a:p>
-                <a:pPr>
-                  <a:defRPr sz="1000" b="0" i="0" u="none" strike="noStrike">
-                    <a:solidFill>
-                      <a:srgbClr val="6E7689"/>
-                    </a:solidFill>
-                    <a:latin typeface="Calibri"/>
-                  </a:defRPr>
-                </a:pPr>
-                <a:r>
-                  <a:rPr sz="1000" b="0" i="0" u="none" strike="noStrike">
-                    <a:solidFill>
-                      <a:srgbClr val="6E7689"/>
-                    </a:solidFill>
-                    <a:latin typeface="Calibri"/>
-                  </a:rPr>
-                  <a:t>₹ crore</a:t>
-                </a:r>
-              </a:p>
-            </c:rich>
-          </c:tx>
-          <c:layout/>
-          <c:overlay val="0"/>
-        </c:title>
-        <c:numFmt formatCode="General" sourceLinked="0"/>
-        <c:majorTickMark val="out"/>
-        <c:minorTickMark val="none"/>
-        <c:tickLblPos val="low"/>
-        <c:spPr>
-          <a:ln w="12700" cap="flat">
-            <a:solidFill>
-              <a:srgbClr val="888888"/>
-            </a:solidFill>
-            <a:prstDash val="solid"/>
-            <a:round/>
-          </a:ln>
-        </c:spPr>
-        <c:txPr>
-          <a:bodyPr/>
-          <a:lstStyle/>
-          <a:p>
-            <a:pPr>
-              <a:defRPr sz="1000" b="0" i="0" u="none" strike="noStrike">
-                <a:solidFill>
-                  <a:srgbClr val="6E7689"/>
-                </a:solidFill>
-                <a:latin typeface="Calibri"/>
-              </a:defRPr>
-            </a:pPr>
-            <a:endParaRPr lang="en-US"/>
-          </a:p>
-        </c:txPr>
-        <c:crossAx val="2094734554"/>
-        <c:crosses val="autoZero"/>
-        <c:crossBetween val="between"/>
-      </c:valAx>
-      <c:spPr>
-        <a:solidFill>
-          <a:srgbClr val="FFFFFF"/>
-        </a:solidFill>
-        <a:ln w="12700" cap="flat">
-          <a:solidFill>
-            <a:srgbClr val="363636"/>
-          </a:solidFill>
-        </a:ln>
-        <a:effectLst/>
-      </c:spPr>
-    </c:plotArea>
-    <c:plotVisOnly val="1"/>
-    <c:dispBlanksAs val="span"/>
-  </c:chart>
-  <c:spPr>
-    <a:noFill/>
-    <a:ln>
-      <a:noFill/>
-    </a:ln>
-    <a:effectLst/>
-  </c:spPr>
-  <c:externalData r:id="rId1">
-    <c:autoUpdate val="0"/>
-  </c:externalData>
-</c:chartSpace>
-</file>
-
-<file path=ppt/charts/chart13.xml><?xml version="1.0" encoding="utf-8"?>
+<file path=ppt/charts/chart10.xml><?xml version="1.0" encoding="utf-8"?>
 <c:chartSpace xmlns:c="http://schemas.openxmlformats.org/drawingml/2006/chart" xmlns:a="http://schemas.openxmlformats.org/drawingml/2006/main" xmlns:r="http://schemas.openxmlformats.org/officeDocument/2006/relationships">
   <c:date1904 val="0"/>
   <c:roundedCorners val="1"/>
@@ -868,7 +577,7 @@
 </c:chartSpace>
 </file>
 
-<file path=ppt/charts/chart14.xml><?xml version="1.0" encoding="utf-8"?>
+<file path=ppt/charts/chart11.xml><?xml version="1.0" encoding="utf-8"?>
 <c:chartSpace xmlns:c="http://schemas.openxmlformats.org/drawingml/2006/chart" xmlns:a="http://schemas.openxmlformats.org/drawingml/2006/main" xmlns:r="http://schemas.openxmlformats.org/officeDocument/2006/relationships">
   <c:date1904 val="0"/>
   <c:roundedCorners val="1"/>
@@ -1189,7 +898,7 @@
 </c:chartSpace>
 </file>
 
-<file path=ppt/charts/chart15.xml><?xml version="1.0" encoding="utf-8"?>
+<file path=ppt/charts/chart12.xml><?xml version="1.0" encoding="utf-8"?>
 <c:chartSpace xmlns:c="http://schemas.openxmlformats.org/drawingml/2006/chart" xmlns:a="http://schemas.openxmlformats.org/drawingml/2006/main" xmlns:r="http://schemas.openxmlformats.org/officeDocument/2006/relationships">
   <c:date1904 val="0"/>
   <c:roundedCorners val="1"/>
@@ -1495,7 +1204,7 @@
 </c:chartSpace>
 </file>
 
-<file path=ppt/charts/chart16.xml><?xml version="1.0" encoding="utf-8"?>
+<file path=ppt/charts/chart13.xml><?xml version="1.0" encoding="utf-8"?>
 <c:chartSpace xmlns:c="http://schemas.openxmlformats.org/drawingml/2006/chart" xmlns:a="http://schemas.openxmlformats.org/drawingml/2006/main" xmlns:r="http://schemas.openxmlformats.org/officeDocument/2006/relationships">
   <c:date1904 val="0"/>
   <c:roundedCorners val="1"/>
@@ -1927,6 +1636,297 @@
         </a:p>
       </c:txPr>
     </c:legend>
+    <c:plotVisOnly val="1"/>
+    <c:dispBlanksAs val="span"/>
+  </c:chart>
+  <c:spPr>
+    <a:noFill/>
+    <a:ln>
+      <a:noFill/>
+    </a:ln>
+    <a:effectLst/>
+  </c:spPr>
+  <c:externalData r:id="rId1">
+    <c:autoUpdate val="0"/>
+  </c:externalData>
+</c:chartSpace>
+</file>
+
+<file path=ppt/charts/chart9.xml><?xml version="1.0" encoding="utf-8"?>
+<c:chartSpace xmlns:c="http://schemas.openxmlformats.org/drawingml/2006/chart" xmlns:a="http://schemas.openxmlformats.org/drawingml/2006/main" xmlns:r="http://schemas.openxmlformats.org/officeDocument/2006/relationships">
+  <c:date1904 val="0"/>
+  <c:roundedCorners val="1"/>
+  <c:chart>
+    <c:autoTitleDeleted val="1"/>
+    <c:plotArea>
+      <c:layout/>
+      <c:barChart>
+        <c:barDir val="bar"/>
+        <c:grouping val="clustered"/>
+        <c:varyColors val="0"/>
+        <c:ser>
+          <c:idx val="0"/>
+          <c:order val="0"/>
+          <c:tx>
+            <c:strRef>
+              <c:f>Sheet1!$B$1</c:f>
+              <c:strCache>
+                <c:ptCount val="1"/>
+                <c:pt idx="0">
+                  <c:v>Capex</c:v>
+                </c:pt>
+              </c:strCache>
+            </c:strRef>
+          </c:tx>
+          <c:spPr>
+            <a:solidFill>
+              <a:srgbClr val="2B66EA"/>
+            </a:solidFill>
+            <a:effectLst/>
+          </c:spPr>
+          <c:invertIfNegative val="0"/>
+          <c:dLbls>
+            <c:numFmt formatCode="0.00" sourceLinked="0"/>
+            <c:txPr>
+              <a:bodyPr/>
+              <a:lstStyle/>
+              <a:p>
+                <a:pPr>
+                  <a:defRPr b="0" i="0" strike="noStrike" sz="900" u="none">
+                    <a:solidFill>
+                      <a:srgbClr val="3B4660"/>
+                    </a:solidFill>
+                    <a:latin typeface="Calibri"/>
+                  </a:defRPr>
+                </a:pPr>
+              </a:p>
+            </c:txPr>
+            <c:showLegendKey val="0"/>
+            <c:showVal val="1"/>
+            <c:showCatName val="0"/>
+            <c:showSerName val="0"/>
+            <c:showPercent val="0"/>
+            <c:showBubbleSize val="0"/>
+            <c:showLeaderLines val="0"/>
+          </c:dLbls>
+          <c:cat>
+            <c:multiLvlStrRef>
+              <c:f>Sheet1!$A$2:$A$7</c:f>
+              <c:multiLvlStrCache>
+                <c:ptCount val="6"/>
+                <c:lvl>
+                  <c:pt idx="0">
+                    <c:v>Civil</c:v>
+                  </c:pt>
+                  <c:pt idx="1">
+                    <c:v>Activity equipment</c:v>
+                  </c:pt>
+                  <c:pt idx="2">
+                    <c:v>F&amp;B outlet fit-out and kitchen</c:v>
+                  </c:pt>
+                  <c:pt idx="3">
+                    <c:v>Ticketing</c:v>
+                  </c:pt>
+                  <c:pt idx="4">
+                    <c:v>Highway signage</c:v>
+                  </c:pt>
+                  <c:pt idx="5">
+                    <c:v>Pre-operative</c:v>
+                  </c:pt>
+                </c:lvl>
+              </c:multiLvlStrCache>
+            </c:multiLvlStrRef>
+          </c:cat>
+          <c:val>
+            <c:numRef>
+              <c:f>Sheet1!$B$2:$B$7</c:f>
+              <c:numCache>
+                <c:formatCode>General</c:formatCode>
+                <c:ptCount val="6"/>
+                <c:pt idx="0">
+                  <c:v>1.3</c:v>
+                </c:pt>
+                <c:pt idx="1">
+                  <c:v>1.9</c:v>
+                </c:pt>
+                <c:pt idx="2">
+                  <c:v>0.35</c:v>
+                </c:pt>
+                <c:pt idx="3">
+                  <c:v>0.15</c:v>
+                </c:pt>
+                <c:pt idx="4">
+                  <c:v>0.12</c:v>
+                </c:pt>
+                <c:pt idx="5">
+                  <c:v>0.18</c:v>
+                </c:pt>
+              </c:numCache>
+            </c:numRef>
+          </c:val>
+        </c:ser>
+        <c:dLbls>
+          <c:numFmt formatCode="0.00" sourceLinked="0"/>
+          <c:txPr>
+            <a:bodyPr/>
+            <a:lstStyle/>
+            <a:p>
+              <a:pPr>
+                <a:defRPr b="0" i="0" strike="noStrike" sz="900" u="none">
+                  <a:solidFill>
+                    <a:srgbClr val="3B4660"/>
+                  </a:solidFill>
+                  <a:latin typeface="Calibri"/>
+                </a:defRPr>
+              </a:pPr>
+            </a:p>
+          </c:txPr>
+          <c:showLegendKey val="0"/>
+          <c:showVal val="1"/>
+          <c:showCatName val="0"/>
+          <c:showSerName val="0"/>
+          <c:showPercent val="0"/>
+          <c:showBubbleSize val="0"/>
+          <c:showLeaderLines val="0"/>
+        </c:dLbls>
+        <c:gapWidth val="45"/>
+        <c:overlap val="0"/>
+        <c:axId val="2094734554"/>
+        <c:axId val="2094734552"/>
+        <c:axId val="2094734556"/>
+      </c:barChart>
+      <c:catAx>
+        <c:axId val="2094734554"/>
+        <c:scaling>
+          <c:orientation val="minMax"/>
+        </c:scaling>
+        <c:delete val="0"/>
+        <c:axPos val="l"/>
+        <c:numFmt formatCode="General" sourceLinked="1"/>
+        <c:majorTickMark val="out"/>
+        <c:minorTickMark val="none"/>
+        <c:tickLblPos val="nextTo"/>
+        <c:spPr>
+          <a:ln w="12700" cap="flat">
+            <a:solidFill>
+              <a:srgbClr val="888888"/>
+            </a:solidFill>
+            <a:prstDash val="solid"/>
+            <a:round/>
+          </a:ln>
+        </c:spPr>
+        <c:txPr>
+          <a:bodyPr/>
+          <a:lstStyle/>
+          <a:p>
+            <a:pPr>
+              <a:defRPr sz="900" b="0" i="0" u="none" strike="noStrike">
+                <a:solidFill>
+                  <a:srgbClr val="3B4660"/>
+                </a:solidFill>
+                <a:latin typeface="Calibri"/>
+              </a:defRPr>
+            </a:pPr>
+            <a:endParaRPr lang="en-US"/>
+          </a:p>
+        </c:txPr>
+        <c:crossAx val="2094734552"/>
+        <c:crosses val="autoZero"/>
+        <c:auto val="1"/>
+        <c:lblAlgn val="ctr"/>
+        <c:noMultiLvlLbl val="1"/>
+      </c:catAx>
+      <c:valAx>
+        <c:axId val="2094734552"/>
+        <c:scaling>
+          <c:orientation val="minMax"/>
+        </c:scaling>
+        <c:delete val="0"/>
+        <c:axPos val="b"/>
+        <c:majorGridlines>
+          <c:spPr>
+            <a:ln w="12700" cap="flat">
+              <a:solidFill>
+                <a:srgbClr val="E2E4EA"/>
+              </a:solidFill>
+              <a:prstDash val="solid"/>
+              <a:round/>
+            </a:ln>
+          </c:spPr>
+        </c:majorGridlines>
+        <c:title>
+          <c:tx>
+            <c:rich>
+              <a:bodyPr/>
+              <a:lstStyle/>
+              <a:p>
+                <a:pPr>
+                  <a:defRPr sz="1000" b="0" i="0" u="none" strike="noStrike">
+                    <a:solidFill>
+                      <a:srgbClr val="6E7689"/>
+                    </a:solidFill>
+                    <a:latin typeface="Calibri"/>
+                  </a:defRPr>
+                </a:pPr>
+                <a:r>
+                  <a:rPr sz="1000" b="0" i="0" u="none" strike="noStrike">
+                    <a:solidFill>
+                      <a:srgbClr val="6E7689"/>
+                    </a:solidFill>
+                    <a:latin typeface="Calibri"/>
+                  </a:rPr>
+                  <a:t>₹ crore</a:t>
+                </a:r>
+              </a:p>
+            </c:rich>
+          </c:tx>
+          <c:layout/>
+          <c:overlay val="0"/>
+        </c:title>
+        <c:numFmt formatCode="General" sourceLinked="0"/>
+        <c:majorTickMark val="out"/>
+        <c:minorTickMark val="none"/>
+        <c:tickLblPos val="low"/>
+        <c:spPr>
+          <a:ln w="12700" cap="flat">
+            <a:solidFill>
+              <a:srgbClr val="888888"/>
+            </a:solidFill>
+            <a:prstDash val="solid"/>
+            <a:round/>
+          </a:ln>
+        </c:spPr>
+        <c:txPr>
+          <a:bodyPr/>
+          <a:lstStyle/>
+          <a:p>
+            <a:pPr>
+              <a:defRPr sz="1000" b="0" i="0" u="none" strike="noStrike">
+                <a:solidFill>
+                  <a:srgbClr val="6E7689"/>
+                </a:solidFill>
+                <a:latin typeface="Calibri"/>
+              </a:defRPr>
+            </a:pPr>
+            <a:endParaRPr lang="en-US"/>
+          </a:p>
+        </c:txPr>
+        <c:crossAx val="2094734554"/>
+        <c:crosses val="autoZero"/>
+        <c:crossBetween val="between"/>
+      </c:valAx>
+      <c:spPr>
+        <a:solidFill>
+          <a:srgbClr val="FFFFFF"/>
+        </a:solidFill>
+        <a:ln w="12700" cap="flat">
+          <a:solidFill>
+            <a:srgbClr val="363636"/>
+          </a:solidFill>
+        </a:ln>
+        <a:effectLst/>
+      </c:spPr>
+    </c:plotArea>
     <c:plotVisOnly val="1"/>
     <c:dispBlanksAs val="span"/>
   </c:chart>

--- a/pptx/EOD-Karnal-Project-Finance.pptx
+++ b/pptx/EOD-Karnal-Project-Finance.pptx
@@ -6140,11 +6140,11 @@
         <p:spPr>
           <a:xfrm>
             <a:off x="566928" y="4224528"/>
-            <a:ext cx="11057839" cy="1737492"/>
+            <a:ext cx="11057839" cy="1962556"/>
           </a:xfrm>
           <a:prstGeom prst="roundRect">
             <a:avLst>
-              <a:gd name="adj" fmla="val 2631"/>
+              <a:gd name="adj" fmla="val 2330"/>
             </a:avLst>
           </a:prstGeom>
           <a:solidFill>
@@ -6248,7 +6248,7 @@
         <p:spPr>
           <a:xfrm>
             <a:off x="804672" y="4860595"/>
-            <a:ext cx="10582351" cy="1028273"/>
+            <a:ext cx="10582351" cy="1253338"/>
           </a:xfrm>
           <a:prstGeom prst="rect">
             <a:avLst/>
@@ -7234,7 +7234,7 @@
         <p:spPr>
           <a:xfrm>
             <a:off x="566928" y="950976"/>
-            <a:ext cx="11057839" cy="462280"/>
+            <a:ext cx="11057839" cy="693420"/>
           </a:xfrm>
           <a:prstGeom prst="rect">
             <a:avLst/>
@@ -7282,7 +7282,7 @@
           </p:nvPr>
         </p:nvGraphicFramePr>
         <p:xfrm>
-          <a:off x="566928" y="1541272"/>
+          <a:off x="566928" y="1772412"/>
           <a:ext cx="11057839" cy="914400"/>
         </p:xfrm>
         <a:graphic>
@@ -8133,7 +8133,7 @@
         </p:nvSpPr>
         <p:spPr>
           <a:xfrm>
-            <a:off x="566928" y="3863848"/>
+            <a:off x="566928" y="4094988"/>
             <a:ext cx="11057839" cy="1962556"/>
           </a:xfrm>
           <a:prstGeom prst="roundRect">
@@ -8160,7 +8160,7 @@
         </p:nvSpPr>
         <p:spPr>
           <a:xfrm>
-            <a:off x="804672" y="3973576"/>
+            <a:off x="804672" y="4204716"/>
             <a:ext cx="2743200" cy="182880"/>
           </a:xfrm>
           <a:prstGeom prst="rect">
@@ -8199,7 +8199,7 @@
         </p:nvSpPr>
         <p:spPr>
           <a:xfrm>
-            <a:off x="804672" y="4156456"/>
+            <a:off x="804672" y="4387596"/>
             <a:ext cx="10582351" cy="288595"/>
           </a:xfrm>
           <a:prstGeom prst="rect">
@@ -8241,7 +8241,7 @@
         </p:nvSpPr>
         <p:spPr>
           <a:xfrm>
-            <a:off x="804672" y="4499915"/>
+            <a:off x="804672" y="4731055"/>
             <a:ext cx="10582351" cy="1253338"/>
           </a:xfrm>
           <a:prstGeom prst="rect">
@@ -15801,11 +15801,11 @@
         <p:spPr>
           <a:xfrm>
             <a:off x="566928" y="3863848"/>
-            <a:ext cx="11057839" cy="1962556"/>
+            <a:ext cx="11057839" cy="2187621"/>
           </a:xfrm>
           <a:prstGeom prst="roundRect">
             <a:avLst>
-              <a:gd name="adj" fmla="val 2330"/>
+              <a:gd name="adj" fmla="val 2090"/>
             </a:avLst>
           </a:prstGeom>
           <a:solidFill>
@@ -15909,7 +15909,7 @@
         <p:spPr>
           <a:xfrm>
             <a:off x="804672" y="4499915"/>
-            <a:ext cx="10582351" cy="1253338"/>
+            <a:ext cx="10582351" cy="1478402"/>
           </a:xfrm>
           <a:prstGeom prst="rect">
             <a:avLst/>

--- a/pptx/EOD-Karnal-Project-Finance.pptx
+++ b/pptx/EOD-Karnal-Project-Finance.pptx
@@ -14525,7 +14525,7 @@
                 <a:ea typeface="Calibri" pitchFamily="34" charset="-122"/>
                 <a:cs typeface="Calibri" pitchFamily="34" charset="-120"/>
               </a:rPr>
-              <a:t>₹4.04 Cr</a:t>
+              <a:t>₹4.01 Cr</a:t>
             </a:r>
             <a:endParaRPr lang="en-US" sz="2600" dirty="0"/>
           </a:p>

--- a/pptx/EOD-Karnal-Project-Finance.pptx
+++ b/pptx/EOD-Karnal-Project-Finance.pptx
@@ -10844,7 +10844,7 @@
         </p:nvGraphicFramePr>
         <p:xfrm>
           <a:off x="566928" y="1541272"/>
-          <a:ext cx="11057839" cy="1965960"/>
+          <a:ext cx="11057839" cy="1691640"/>
         </p:xfrm>
         <a:graphic xmlns:a="http://schemas.openxmlformats.org/drawingml/2006/main">
           <a:graphicData uri="http://schemas.openxmlformats.org/drawingml/2006/chart">
@@ -10867,7 +10867,7 @@
           </p:nvPr>
         </p:nvGraphicFramePr>
         <p:xfrm>
-          <a:off x="566928" y="3735832"/>
+          <a:off x="566928" y="3461512"/>
           <a:ext cx="11057839" cy="914400"/>
         </p:xfrm>
         <a:graphic>
@@ -10880,7 +10880,7 @@
                 <a:gridCol w="2588666"/>
                 <a:gridCol w="2588666"/>
               </a:tblGrid>
-              <a:tr h="292608">
+              <a:tr h="256032">
                 <a:tc>
                   <a:txBody>
                     <a:bodyPr/>
@@ -11143,7 +11143,7 @@
                   </a:tcPr>
                 </a:tc>
               </a:tr>
-              <a:tr h="292608">
+              <a:tr h="256032">
                 <a:tc>
                   <a:txBody>
                     <a:bodyPr/>
@@ -11153,7 +11153,7 @@
                         <a:buNone/>
                       </a:pPr>
                       <a:r>
-                        <a:rPr lang="en-US" sz="1100" dirty="0">
+                        <a:rPr lang="en-US" sz="1050" dirty="0">
                           <a:solidFill>
                             <a:srgbClr val="3B4660"/>
                           </a:solidFill>
@@ -11163,7 +11163,7 @@
                         </a:rPr>
                         <a:t>Year 1 EBITDA</a:t>
                       </a:r>
-                      <a:endParaRPr lang="en-US" sz="1100" dirty="0">
+                      <a:endParaRPr lang="en-US" sz="1050" dirty="0">
                         <a:latin typeface="Calibri" charset="0"/>
                         <a:ea typeface="Calibri" charset="0"/>
                         <a:cs typeface="Calibri" charset="0"/>
@@ -11221,7 +11221,7 @@
                         <a:buNone/>
                       </a:pPr>
                       <a:r>
-                        <a:rPr lang="en-US" sz="1100" dirty="0">
+                        <a:rPr lang="en-US" sz="1050" dirty="0">
                           <a:solidFill>
                             <a:srgbClr val="3B4660"/>
                           </a:solidFill>
@@ -11231,7 +11231,7 @@
                         </a:rPr>
                         <a:t>₹-0.64 Cr</a:t>
                       </a:r>
-                      <a:endParaRPr lang="en-US" sz="1100" dirty="0">
+                      <a:endParaRPr lang="en-US" sz="1050" dirty="0">
                         <a:latin typeface="Calibri" charset="0"/>
                         <a:ea typeface="Calibri" charset="0"/>
                         <a:cs typeface="Calibri" charset="0"/>
@@ -11289,7 +11289,7 @@
                         <a:buNone/>
                       </a:pPr>
                       <a:r>
-                        <a:rPr lang="en-US" sz="1100" dirty="0">
+                        <a:rPr lang="en-US" sz="1050" dirty="0">
                           <a:solidFill>
                             <a:srgbClr val="3B4660"/>
                           </a:solidFill>
@@ -11299,7 +11299,7 @@
                         </a:rPr>
                         <a:t>₹-0.38 Cr</a:t>
                       </a:r>
-                      <a:endParaRPr lang="en-US" sz="1100" dirty="0">
+                      <a:endParaRPr lang="en-US" sz="1050" dirty="0">
                         <a:latin typeface="Calibri" charset="0"/>
                         <a:ea typeface="Calibri" charset="0"/>
                         <a:cs typeface="Calibri" charset="0"/>
@@ -11357,7 +11357,7 @@
                         <a:buNone/>
                       </a:pPr>
                       <a:r>
-                        <a:rPr lang="en-US" sz="1100" dirty="0">
+                        <a:rPr lang="en-US" sz="1050" dirty="0">
                           <a:solidFill>
                             <a:srgbClr val="3B4660"/>
                           </a:solidFill>
@@ -11367,7 +11367,7 @@
                         </a:rPr>
                         <a:t>₹-0.21 Cr</a:t>
                       </a:r>
-                      <a:endParaRPr lang="en-US" sz="1100" dirty="0">
+                      <a:endParaRPr lang="en-US" sz="1050" dirty="0">
                         <a:latin typeface="Calibri" charset="0"/>
                         <a:ea typeface="Calibri" charset="0"/>
                         <a:cs typeface="Calibri" charset="0"/>
@@ -11417,7 +11417,7 @@
                   </a:tcPr>
                 </a:tc>
               </a:tr>
-              <a:tr h="292608">
+              <a:tr h="256032">
                 <a:tc>
                   <a:txBody>
                     <a:bodyPr/>
@@ -11427,7 +11427,7 @@
                         <a:buNone/>
                       </a:pPr>
                       <a:r>
-                        <a:rPr lang="en-US" sz="1100" dirty="0">
+                        <a:rPr lang="en-US" sz="1050" dirty="0">
                           <a:solidFill>
                             <a:srgbClr val="3B4660"/>
                           </a:solidFill>
@@ -11437,7 +11437,7 @@
                         </a:rPr>
                         <a:t>Stabilised revenue</a:t>
                       </a:r>
-                      <a:endParaRPr lang="en-US" sz="1100" dirty="0">
+                      <a:endParaRPr lang="en-US" sz="1050" dirty="0">
                         <a:latin typeface="Calibri" charset="0"/>
                         <a:ea typeface="Calibri" charset="0"/>
                         <a:cs typeface="Calibri" charset="0"/>
@@ -11495,7 +11495,7 @@
                         <a:buNone/>
                       </a:pPr>
                       <a:r>
-                        <a:rPr lang="en-US" sz="1100" dirty="0">
+                        <a:rPr lang="en-US" sz="1050" dirty="0">
                           <a:solidFill>
                             <a:srgbClr val="3B4660"/>
                           </a:solidFill>
@@ -11505,7 +11505,7 @@
                         </a:rPr>
                         <a:t>₹3.83 Cr</a:t>
                       </a:r>
-                      <a:endParaRPr lang="en-US" sz="1100" dirty="0">
+                      <a:endParaRPr lang="en-US" sz="1050" dirty="0">
                         <a:latin typeface="Calibri" charset="0"/>
                         <a:ea typeface="Calibri" charset="0"/>
                         <a:cs typeface="Calibri" charset="0"/>
@@ -11563,7 +11563,7 @@
                         <a:buNone/>
                       </a:pPr>
                       <a:r>
-                        <a:rPr lang="en-US" sz="1100" dirty="0">
+                        <a:rPr lang="en-US" sz="1050" dirty="0">
                           <a:solidFill>
                             <a:srgbClr val="3B4660"/>
                           </a:solidFill>
@@ -11573,7 +11573,7 @@
                         </a:rPr>
                         <a:t>₹5.10 Cr</a:t>
                       </a:r>
-                      <a:endParaRPr lang="en-US" sz="1100" dirty="0">
+                      <a:endParaRPr lang="en-US" sz="1050" dirty="0">
                         <a:latin typeface="Calibri" charset="0"/>
                         <a:ea typeface="Calibri" charset="0"/>
                         <a:cs typeface="Calibri" charset="0"/>
@@ -11631,7 +11631,7 @@
                         <a:buNone/>
                       </a:pPr>
                       <a:r>
-                        <a:rPr lang="en-US" sz="1100" dirty="0">
+                        <a:rPr lang="en-US" sz="1050" dirty="0">
                           <a:solidFill>
                             <a:srgbClr val="3B4660"/>
                           </a:solidFill>
@@ -11641,7 +11641,7 @@
                         </a:rPr>
                         <a:t>₹6.12 Cr</a:t>
                       </a:r>
-                      <a:endParaRPr lang="en-US" sz="1100" dirty="0">
+                      <a:endParaRPr lang="en-US" sz="1050" dirty="0">
                         <a:latin typeface="Calibri" charset="0"/>
                         <a:ea typeface="Calibri" charset="0"/>
                         <a:cs typeface="Calibri" charset="0"/>
@@ -11691,7 +11691,7 @@
                   </a:tcPr>
                 </a:tc>
               </a:tr>
-              <a:tr h="292608">
+              <a:tr h="256032">
                 <a:tc>
                   <a:txBody>
                     <a:bodyPr/>
@@ -11701,7 +11701,7 @@
                         <a:buNone/>
                       </a:pPr>
                       <a:r>
-                        <a:rPr lang="en-US" sz="1100" dirty="0">
+                        <a:rPr lang="en-US" sz="1050" dirty="0">
                           <a:solidFill>
                             <a:srgbClr val="3B4660"/>
                           </a:solidFill>
@@ -11711,7 +11711,7 @@
                         </a:rPr>
                         <a:t>Stabilised EBITDA margin</a:t>
                       </a:r>
-                      <a:endParaRPr lang="en-US" sz="1100" dirty="0">
+                      <a:endParaRPr lang="en-US" sz="1050" dirty="0">
                         <a:latin typeface="Calibri" charset="0"/>
                         <a:ea typeface="Calibri" charset="0"/>
                         <a:cs typeface="Calibri" charset="0"/>
@@ -11769,7 +11769,7 @@
                         <a:buNone/>
                       </a:pPr>
                       <a:r>
-                        <a:rPr lang="en-US" sz="1100" dirty="0">
+                        <a:rPr lang="en-US" sz="1050" dirty="0">
                           <a:solidFill>
                             <a:srgbClr val="3B4660"/>
                           </a:solidFill>
@@ -11779,7 +11779,7 @@
                         </a:rPr>
                         <a:t>14.3%</a:t>
                       </a:r>
-                      <a:endParaRPr lang="en-US" sz="1100" dirty="0">
+                      <a:endParaRPr lang="en-US" sz="1050" dirty="0">
                         <a:latin typeface="Calibri" charset="0"/>
                         <a:ea typeface="Calibri" charset="0"/>
                         <a:cs typeface="Calibri" charset="0"/>
@@ -11837,7 +11837,7 @@
                         <a:buNone/>
                       </a:pPr>
                       <a:r>
-                        <a:rPr lang="en-US" sz="1100" dirty="0">
+                        <a:rPr lang="en-US" sz="1050" dirty="0">
                           <a:solidFill>
                             <a:srgbClr val="3B4660"/>
                           </a:solidFill>
@@ -11847,7 +11847,7 @@
                         </a:rPr>
                         <a:t>37.7%</a:t>
                       </a:r>
-                      <a:endParaRPr lang="en-US" sz="1100" dirty="0">
+                      <a:endParaRPr lang="en-US" sz="1050" dirty="0">
                         <a:latin typeface="Calibri" charset="0"/>
                         <a:ea typeface="Calibri" charset="0"/>
                         <a:cs typeface="Calibri" charset="0"/>
@@ -11905,7 +11905,7 @@
                         <a:buNone/>
                       </a:pPr>
                       <a:r>
-                        <a:rPr lang="en-US" sz="1100" dirty="0">
+                        <a:rPr lang="en-US" sz="1050" dirty="0">
                           <a:solidFill>
                             <a:srgbClr val="3B4660"/>
                           </a:solidFill>
@@ -11915,7 +11915,7 @@
                         </a:rPr>
                         <a:t>47.9%</a:t>
                       </a:r>
-                      <a:endParaRPr lang="en-US" sz="1100" dirty="0">
+                      <a:endParaRPr lang="en-US" sz="1050" dirty="0">
                         <a:latin typeface="Calibri" charset="0"/>
                         <a:ea typeface="Calibri" charset="0"/>
                         <a:cs typeface="Calibri" charset="0"/>
@@ -11965,7 +11965,7 @@
                   </a:tcPr>
                 </a:tc>
               </a:tr>
-              <a:tr h="292608">
+              <a:tr h="256032">
                 <a:tc>
                   <a:txBody>
                     <a:bodyPr/>
@@ -11975,7 +11975,7 @@
                         <a:buNone/>
                       </a:pPr>
                       <a:r>
-                        <a:rPr lang="en-US" sz="1100" b="1" dirty="0">
+                        <a:rPr lang="en-US" sz="1050" b="1" dirty="0">
                           <a:solidFill>
                             <a:srgbClr val="0A1426"/>
                           </a:solidFill>
@@ -11985,7 +11985,7 @@
                         </a:rPr>
                         <a:t>Payback</a:t>
                       </a:r>
-                      <a:endParaRPr lang="en-US" sz="1100" dirty="0">
+                      <a:endParaRPr lang="en-US" sz="1050" dirty="0">
                         <a:latin typeface="Calibri" charset="0"/>
                         <a:ea typeface="Calibri" charset="0"/>
                         <a:cs typeface="Calibri" charset="0"/>
@@ -12043,7 +12043,7 @@
                         <a:buNone/>
                       </a:pPr>
                       <a:r>
-                        <a:rPr lang="en-US" sz="1100" b="1" dirty="0">
+                        <a:rPr lang="en-US" sz="1050" b="1" dirty="0">
                           <a:solidFill>
                             <a:srgbClr val="0A1426"/>
                           </a:solidFill>
@@ -12053,7 +12053,7 @@
                         </a:rPr>
                         <a:t>Not within term</a:t>
                       </a:r>
-                      <a:endParaRPr lang="en-US" sz="1100" dirty="0">
+                      <a:endParaRPr lang="en-US" sz="1050" dirty="0">
                         <a:latin typeface="Calibri" charset="0"/>
                         <a:ea typeface="Calibri" charset="0"/>
                         <a:cs typeface="Calibri" charset="0"/>
@@ -12111,7 +12111,7 @@
                         <a:buNone/>
                       </a:pPr>
                       <a:r>
-                        <a:rPr lang="en-US" sz="1100" b="1" dirty="0">
+                        <a:rPr lang="en-US" sz="1050" b="1" dirty="0">
                           <a:solidFill>
                             <a:srgbClr val="0A1426"/>
                           </a:solidFill>
@@ -12121,7 +12121,7 @@
                         </a:rPr>
                         <a:t>5.1 yrs</a:t>
                       </a:r>
-                      <a:endParaRPr lang="en-US" sz="1100" dirty="0">
+                      <a:endParaRPr lang="en-US" sz="1050" dirty="0">
                         <a:latin typeface="Calibri" charset="0"/>
                         <a:ea typeface="Calibri" charset="0"/>
                         <a:cs typeface="Calibri" charset="0"/>
@@ -12179,7 +12179,7 @@
                         <a:buNone/>
                       </a:pPr>
                       <a:r>
-                        <a:rPr lang="en-US" sz="1100" b="1" dirty="0">
+                        <a:rPr lang="en-US" sz="1050" b="1" dirty="0">
                           <a:solidFill>
                             <a:srgbClr val="0A1426"/>
                           </a:solidFill>
@@ -12189,7 +12189,7 @@
                         </a:rPr>
                         <a:t>3.9 yrs</a:t>
                       </a:r>
-                      <a:endParaRPr lang="en-US" sz="1100" dirty="0">
+                      <a:endParaRPr lang="en-US" sz="1050" dirty="0">
                         <a:latin typeface="Calibri" charset="0"/>
                         <a:ea typeface="Calibri" charset="0"/>
                         <a:cs typeface="Calibri" charset="0"/>
@@ -12251,12 +12251,12 @@
         </p:nvSpPr>
         <p:spPr>
           <a:xfrm>
-            <a:off x="566928" y="3836416"/>
-            <a:ext cx="11057839" cy="1287363"/>
+            <a:off x="566928" y="5215636"/>
+            <a:ext cx="11057839" cy="1132830"/>
           </a:xfrm>
           <a:prstGeom prst="roundRect">
             <a:avLst>
-              <a:gd name="adj" fmla="val 3551"/>
+              <a:gd name="adj" fmla="val 4036"/>
             </a:avLst>
           </a:prstGeom>
           <a:solidFill>
@@ -12278,7 +12278,7 @@
         </p:nvSpPr>
         <p:spPr>
           <a:xfrm>
-            <a:off x="804672" y="3946144"/>
+            <a:off x="804672" y="5325364"/>
             <a:ext cx="2743200" cy="182880"/>
           </a:xfrm>
           <a:prstGeom prst="rect">
@@ -12317,8 +12317,8 @@
         </p:nvSpPr>
         <p:spPr>
           <a:xfrm>
-            <a:off x="804672" y="4129024"/>
-            <a:ext cx="10582351" cy="288595"/>
+            <a:off x="804672" y="5508244"/>
+            <a:ext cx="10582351" cy="227838"/>
           </a:xfrm>
           <a:prstGeom prst="rect">
             <a:avLst/>
@@ -12332,12 +12332,12 @@
           <a:p>
             <a:pPr indent="0" marL="0">
               <a:lnSpc>
-                <a:spcPts val="2185"/>
+                <a:spcPts val="1725"/>
               </a:lnSpc>
               <a:buNone/>
             </a:pPr>
             <a:r>
-              <a:rPr lang="en-US" sz="1900" b="1" dirty="0">
+              <a:rPr lang="en-US" sz="1500" b="1" dirty="0">
                 <a:solidFill>
                   <a:srgbClr val="0A1426"/>
                 </a:solidFill>
@@ -12347,7 +12347,7 @@
               </a:rPr>
               <a:t>Even the downside services its debt</a:t>
             </a:r>
-            <a:endParaRPr lang="en-US" sz="1900" dirty="0"/>
+            <a:endParaRPr lang="en-US" sz="1500" dirty="0"/>
           </a:p>
         </p:txBody>
       </p:sp>
@@ -12359,8 +12359,8 @@
         </p:nvSpPr>
         <p:spPr>
           <a:xfrm>
-            <a:off x="804672" y="4472483"/>
-            <a:ext cx="10582351" cy="578145"/>
+            <a:off x="804672" y="5790946"/>
+            <a:ext cx="10582351" cy="484368"/>
           </a:xfrm>
           <a:prstGeom prst="rect">
             <a:avLst/>
@@ -12374,12 +12374,12 @@
           <a:p>
             <a:pPr indent="0" marL="0">
               <a:lnSpc>
-                <a:spcPts val="1704"/>
+                <a:spcPts val="1349"/>
               </a:lnSpc>
               <a:buNone/>
             </a:pPr>
             <a:r>
-              <a:rPr lang="en-US" sz="1200" dirty="0">
+              <a:rPr lang="en-US" sz="950" dirty="0">
                 <a:solidFill>
                   <a:srgbClr val="3B4660"/>
                 </a:solidFill>
@@ -12389,7 +12389,7 @@
               </a:rPr>
               <a:t>At 25% below base — under the floor of the published range — the project still reaches ₹0.55 Cr of stabilised EBITDA. A project with its own assets flexes its cost base; one renting somebody else's cannot.</a:t>
             </a:r>
-            <a:endParaRPr lang="en-US" sz="1200" dirty="0"/>
+            <a:endParaRPr lang="en-US" sz="950" dirty="0"/>
           </a:p>
         </p:txBody>
       </p:sp>
